--- a/Homework1/Presentazione_da_terminare.pptx
+++ b/Homework1/Presentazione_da_terminare.pptx
@@ -119,7 +119,7 @@
 <file path=ppt/revisionInfo.xml><?xml version="1.0" encoding="utf-8"?>
 <p1510:revInfo xmlns:a="http://schemas.openxmlformats.org/drawingml/2006/main" xmlns:r="http://schemas.openxmlformats.org/officeDocument/2006/relationships" xmlns:p1510="http://schemas.microsoft.com/office/powerpoint/2015/10/main">
   <p1510:revLst>
-    <p1510:client id="{DA902B99-5EE0-E666-749D-04F7FC41BD1C}" v="1228" dt="2026-03-12T17:31:17.881"/>
+    <p1510:client id="{D4FBFE79-F34D-5D26-24B0-6A50C7510943}" v="245" dt="2026-03-15T10:55:34.696"/>
   </p1510:revLst>
 </p1510:revInfo>
 </file>
@@ -1596,7 +1596,7 @@
               <a:buNone/>
             </a:pPr>
             <a:r>
-              <a:rPr lang="en-US" b="1" dirty="0" err="1">
+              <a:rPr lang="en-US" sz="2000" b="1" dirty="0" err="1">
                 <a:solidFill>
                   <a:srgbClr val="1B3D7D"/>
                 </a:solidFill>
@@ -1695,7 +1695,7 @@
               <a:buNone/>
             </a:pPr>
             <a:r>
-              <a:rPr lang="en-US" b="1" dirty="0" err="1">
+              <a:rPr lang="en-US" sz="2000" b="1" dirty="0" err="1">
                 <a:solidFill>
                   <a:srgbClr val="1B3D7D"/>
                 </a:solidFill>
@@ -1991,58 +1991,6 @@
       </p:grpSpPr>
       <p:sp>
         <p:nvSpPr>
-          <p:cNvPr id="32" name="Rettangolo 31">
-            <a:extLst>
-              <a:ext uri="{FF2B5EF4-FFF2-40B4-BE49-F238E27FC236}">
-                <a16:creationId xmlns:a16="http://schemas.microsoft.com/office/drawing/2014/main" id="{8C0E4178-B9C4-7C49-E09E-ACB03E5048B4}"/>
-              </a:ext>
-            </a:extLst>
-          </p:cNvPr>
-          <p:cNvSpPr/>
-          <p:nvPr/>
-        </p:nvSpPr>
-        <p:spPr>
-          <a:xfrm>
-            <a:off x="345355" y="1949200"/>
-            <a:ext cx="8417108" cy="2994376"/>
-          </a:xfrm>
-          <a:prstGeom prst="rect">
-            <a:avLst/>
-          </a:prstGeom>
-          <a:solidFill>
-            <a:schemeClr val="accent1">
-              <a:lumMod val="20000"/>
-              <a:lumOff val="80000"/>
-            </a:schemeClr>
-          </a:solidFill>
-        </p:spPr>
-        <p:style>
-          <a:lnRef idx="2">
-            <a:schemeClr val="accent1">
-              <a:shade val="15000"/>
-            </a:schemeClr>
-          </a:lnRef>
-          <a:fillRef idx="1">
-            <a:schemeClr val="accent1"/>
-          </a:fillRef>
-          <a:effectRef idx="0">
-            <a:schemeClr val="accent1"/>
-          </a:effectRef>
-          <a:fontRef idx="minor">
-            <a:schemeClr val="lt1"/>
-          </a:fontRef>
-        </p:style>
-        <p:txBody>
-          <a:bodyPr rtlCol="0" anchor="ctr"/>
-          <a:lstStyle/>
-          <a:p>
-            <a:pPr algn="ctr"/>
-            <a:endParaRPr lang="it-IT"/>
-          </a:p>
-        </p:txBody>
-      </p:sp>
-      <p:sp>
-        <p:nvSpPr>
           <p:cNvPr id="5" name="Text 3">
             <a:extLst>
               <a:ext uri="{FF2B5EF4-FFF2-40B4-BE49-F238E27FC236}">
@@ -2095,7 +2043,7 @@
         </p:nvSpPr>
         <p:spPr>
           <a:xfrm>
-            <a:off x="342842" y="757043"/>
+            <a:off x="458589" y="1205562"/>
             <a:ext cx="4114800" cy="292608"/>
           </a:xfrm>
           <a:prstGeom prst="rect">
@@ -2112,7 +2060,7 @@
               <a:buNone/>
             </a:pPr>
             <a:r>
-              <a:rPr lang="en-US" b="1" dirty="0" err="1">
+              <a:rPr lang="en-US" sz="2000" b="1" dirty="0" err="1">
                 <a:solidFill>
                   <a:srgbClr val="1B3D7D"/>
                 </a:solidFill>
@@ -2276,55 +2224,39 @@
           </a:p>
         </p:txBody>
       </p:sp>
-      <p:sp>
-        <p:nvSpPr>
-          <p:cNvPr id="4" name="CasellaDiTesto 3">
+      <p:pic>
+        <p:nvPicPr>
+          <p:cNvPr id="2" name="Immagine 1" descr="Immagine che contiene diagramma, Diagramma, linea&#10;&#10;Il contenuto generato dall&amp;#39;IA potrebbe non essere corretto.">
             <a:extLst>
               <a:ext uri="{FF2B5EF4-FFF2-40B4-BE49-F238E27FC236}">
-                <a16:creationId xmlns:a16="http://schemas.microsoft.com/office/drawing/2014/main" id="{8A48A8D0-9F10-ED83-2D0A-31C8FD3C69F5}"/>
+                <a16:creationId xmlns:a16="http://schemas.microsoft.com/office/drawing/2014/main" id="{28BD64FB-27C8-DA3A-C4E9-EDEFDC2919AA}"/>
               </a:ext>
             </a:extLst>
           </p:cNvPr>
-          <p:cNvSpPr txBox="1"/>
+          <p:cNvPicPr>
+            <a:picLocks noChangeAspect="1"/>
+          </p:cNvPicPr>
           <p:nvPr/>
-        </p:nvSpPr>
+        </p:nvPicPr>
+        <p:blipFill>
+          <a:blip r:embed="rId4"/>
+          <a:stretch>
+            <a:fillRect/>
+          </a:stretch>
+        </p:blipFill>
         <p:spPr>
           <a:xfrm>
-            <a:off x="457459" y="3177912"/>
-            <a:ext cx="8306283" cy="646331"/>
+            <a:off x="4275847" y="839165"/>
+            <a:ext cx="4723015" cy="4203058"/>
           </a:xfrm>
           <a:prstGeom prst="rect">
             <a:avLst/>
           </a:prstGeom>
-          <a:noFill/>
           <a:ln>
             <a:noFill/>
           </a:ln>
         </p:spPr>
-        <p:txBody>
-          <a:bodyPr rot="0" spcFirstLastPara="0" vertOverflow="overflow" horzOverflow="overflow" vert="horz" wrap="square" lIns="91440" tIns="45720" rIns="91440" bIns="45720" numCol="1" spcCol="0" rtlCol="0" fromWordArt="0" anchor="ctr" anchorCtr="0" forceAA="0" compatLnSpc="1">
-            <a:prstTxWarp prst="textNoShape">
-              <a:avLst/>
-            </a:prstTxWarp>
-            <a:spAutoFit/>
-          </a:bodyPr>
-          <a:lstStyle/>
-          <a:p>
-            <a:pPr algn="ctr"/>
-            <a:r>
-              <a:rPr lang="it-IT" dirty="0">
-                <a:ea typeface="Calibri"/>
-                <a:cs typeface="Calibri"/>
-              </a:rPr>
-              <a:t>Inserire i quattro grafici ? (il rettangolo è solo indicativo meglio toglierlo ed è messo a caso se si cambia va bene)</a:t>
-            </a:r>
-            <a:endParaRPr lang="it-IT" dirty="0" err="1">
-              <a:ea typeface="Calibri" panose="020F0502020204030204"/>
-              <a:cs typeface="Calibri" panose="020F0502020204030204"/>
-            </a:endParaRPr>
-          </a:p>
-        </p:txBody>
-      </p:sp>
+      </p:pic>
     </p:spTree>
     <p:extLst>
       <p:ext uri="{BB962C8B-B14F-4D97-AF65-F5344CB8AC3E}">
@@ -2459,7 +2391,7 @@
         </p:nvSpPr>
         <p:spPr>
           <a:xfrm>
-            <a:off x="1820794" y="196133"/>
+            <a:off x="1820794" y="102089"/>
             <a:ext cx="6949440" cy="475488"/>
           </a:xfrm>
           <a:prstGeom prst="rect">
@@ -2520,112 +2452,244 @@
           </a:p>
         </p:txBody>
       </p:sp>
-      <p:sp>
-        <p:nvSpPr>
-          <p:cNvPr id="4" name="CasellaDiTesto 3">
+      <p:cxnSp>
+        <p:nvCxnSpPr>
+          <p:cNvPr id="5" name="Connettore 2 4">
             <a:extLst>
               <a:ext uri="{FF2B5EF4-FFF2-40B4-BE49-F238E27FC236}">
-                <a16:creationId xmlns:a16="http://schemas.microsoft.com/office/drawing/2014/main" id="{A8E02A6F-D229-0A7A-9209-AE4F7DC79FA5}"/>
+                <a16:creationId xmlns:a16="http://schemas.microsoft.com/office/drawing/2014/main" id="{A29174C0-F434-9E67-AF61-D6442F666134}"/>
               </a:ext>
             </a:extLst>
           </p:cNvPr>
-          <p:cNvSpPr txBox="1"/>
+          <p:cNvCxnSpPr/>
           <p:nvPr/>
-        </p:nvSpPr>
+        </p:nvCxnSpPr>
         <p:spPr>
           <a:xfrm>
-            <a:off x="560537" y="1066830"/>
-            <a:ext cx="7946980" cy="2585323"/>
+            <a:off x="4337740" y="820903"/>
+            <a:ext cx="7227" cy="4119080"/>
+          </a:xfrm>
+          <a:prstGeom prst="straightConnector1">
+            <a:avLst/>
+          </a:prstGeom>
+          <a:ln w="28575">
+            <a:solidFill>
+              <a:schemeClr val="bg2"/>
+            </a:solidFill>
+          </a:ln>
+        </p:spPr>
+        <p:style>
+          <a:lnRef idx="3">
+            <a:schemeClr val="accent3"/>
+          </a:lnRef>
+          <a:fillRef idx="0">
+            <a:schemeClr val="accent3"/>
+          </a:fillRef>
+          <a:effectRef idx="2">
+            <a:schemeClr val="accent3"/>
+          </a:effectRef>
+          <a:fontRef idx="minor">
+            <a:schemeClr val="tx1"/>
+          </a:fontRef>
+        </p:style>
+      </p:cxnSp>
+      <p:sp>
+        <p:nvSpPr>
+          <p:cNvPr id="11" name="Text 4">
+            <a:extLst>
+              <a:ext uri="{FF2B5EF4-FFF2-40B4-BE49-F238E27FC236}">
+                <a16:creationId xmlns:a16="http://schemas.microsoft.com/office/drawing/2014/main" id="{7CCF26C0-AB7C-5941-8FE5-82401EB320EE}"/>
+              </a:ext>
+            </a:extLst>
+          </p:cNvPr>
+          <p:cNvSpPr/>
+          <p:nvPr/>
+        </p:nvSpPr>
+        <p:spPr>
+          <a:xfrm>
+            <a:off x="183690" y="822150"/>
+            <a:ext cx="4114800" cy="292608"/>
           </a:xfrm>
           <a:prstGeom prst="rect">
             <a:avLst/>
           </a:prstGeom>
           <a:noFill/>
+          <a:ln/>
         </p:spPr>
         <p:txBody>
-          <a:bodyPr rot="0" spcFirstLastPara="0" vertOverflow="overflow" horzOverflow="overflow" vert="horz" wrap="square" lIns="91440" tIns="45720" rIns="91440" bIns="45720" numCol="1" spcCol="0" rtlCol="0" fromWordArt="0" anchor="t" anchorCtr="0" forceAA="0" compatLnSpc="1">
-            <a:prstTxWarp prst="textNoShape">
-              <a:avLst/>
-            </a:prstTxWarp>
-            <a:spAutoFit/>
-          </a:bodyPr>
+          <a:bodyPr wrap="square" lIns="0" tIns="0" rIns="0" bIns="0" rtlCol="0" anchor="ctr"/>
           <a:lstStyle/>
           <a:p>
-            <a:r>
-              <a:rPr lang="it-IT">
-                <a:ea typeface="Calibri"/>
-                <a:cs typeface="Calibri"/>
-              </a:rPr>
-              <a:t>Disclaimer</a:t>
-            </a:r>
-          </a:p>
-          <a:p>
-            <a:r>
-              <a:rPr lang="it-IT" dirty="0">
-                <a:ea typeface="Calibri"/>
-                <a:cs typeface="Calibri"/>
-              </a:rPr>
-              <a:t>va valutato cosa inserire qui l'idea è di vedere se inserire 1 o 2 grafici (dipende se entrano) </a:t>
-            </a:r>
-          </a:p>
-          <a:p>
-            <a:r>
-              <a:rPr lang="it-IT" dirty="0">
-                <a:ea typeface="Calibri"/>
-                <a:cs typeface="Calibri"/>
-              </a:rPr>
-              <a:t>riguardo alla convergenza dei beta stimati al numero di iterazioni della simulazione </a:t>
-            </a:r>
-            <a:r>
-              <a:rPr lang="it-IT">
-                <a:ea typeface="Calibri"/>
-                <a:cs typeface="Calibri"/>
-              </a:rPr>
-              <a:t>di Montecarlo e </a:t>
-            </a:r>
-          </a:p>
-          <a:p>
-            <a:r>
-              <a:rPr lang="it-IT" dirty="0">
-                <a:ea typeface="Calibri"/>
-                <a:cs typeface="Calibri"/>
-              </a:rPr>
-              <a:t>l'altro grafico riguardo al com</a:t>
-            </a:r>
-            <a:r>
-              <a:rPr lang="it-IT" dirty="0"/>
-              <a:t>portamento del </a:t>
-            </a:r>
-            <a:r>
-              <a:rPr lang="it-IT" dirty="0" err="1"/>
-              <a:t>bias</a:t>
-            </a:r>
-            <a:r>
-              <a:rPr lang="it-IT" dirty="0"/>
-              <a:t> del problema della variabile omessa come varia al cambiare dei valori di rho e beta2</a:t>
-            </a:r>
-          </a:p>
-          <a:p>
-            <a:endParaRPr lang="it-IT" dirty="0">
+            <a:pPr algn="ctr"/>
+            <a:r>
+              <a:rPr lang="en-US" sz="2200" b="1" dirty="0" err="1">
+                <a:solidFill>
+                  <a:srgbClr val="1B3D7D"/>
+                </a:solidFill>
+                <a:latin typeface="Calibri"/>
+                <a:ea typeface="Calibri"/>
+                <a:cs typeface="Calibri"/>
+              </a:rPr>
+              <a:t>Convergenza</a:t>
+            </a:r>
+            <a:r>
+              <a:rPr lang="en-US" sz="2200" b="1" dirty="0">
+                <a:solidFill>
+                  <a:srgbClr val="1B3D7D"/>
+                </a:solidFill>
+                <a:latin typeface="Calibri"/>
+                <a:ea typeface="Calibri"/>
+                <a:cs typeface="Calibri"/>
+              </a:rPr>
+              <a:t> con  Monte Carlo</a:t>
+            </a:r>
+            <a:endParaRPr lang="en-US" sz="2200" b="1">
+              <a:solidFill>
+                <a:srgbClr val="1B3D7D"/>
+              </a:solidFill>
+              <a:ea typeface="Calibri" panose="020F0502020204030204"/>
+              <a:cs typeface="Calibri" panose="020F0502020204030204"/>
+            </a:endParaRPr>
+          </a:p>
+        </p:txBody>
+      </p:sp>
+      <p:sp>
+        <p:nvSpPr>
+          <p:cNvPr id="12" name="Text 4">
+            <a:extLst>
+              <a:ext uri="{FF2B5EF4-FFF2-40B4-BE49-F238E27FC236}">
+                <a16:creationId xmlns:a16="http://schemas.microsoft.com/office/drawing/2014/main" id="{1C14D6D8-DB7A-69DE-E8F1-117327115C6B}"/>
+              </a:ext>
+            </a:extLst>
+          </p:cNvPr>
+          <p:cNvSpPr/>
+          <p:nvPr/>
+        </p:nvSpPr>
+        <p:spPr>
+          <a:xfrm>
+            <a:off x="4654409" y="822149"/>
+            <a:ext cx="4114800" cy="292608"/>
+          </a:xfrm>
+          <a:prstGeom prst="rect">
+            <a:avLst/>
+          </a:prstGeom>
+          <a:noFill/>
+          <a:ln/>
+        </p:spPr>
+        <p:txBody>
+          <a:bodyPr wrap="square" lIns="0" tIns="0" rIns="0" bIns="0" rtlCol="0" anchor="t"/>
+          <a:lstStyle/>
+          <a:p>
+            <a:pPr algn="ctr"/>
+            <a:r>
+              <a:rPr lang="en-US" sz="2200" b="1" dirty="0">
+                <a:solidFill>
+                  <a:srgbClr val="004180"/>
+                </a:solidFill>
+              </a:rPr>
+              <a:t>Bias al </a:t>
+            </a:r>
+            <a:r>
+              <a:rPr lang="en-US" sz="2200" b="1" dirty="0" err="1">
+                <a:solidFill>
+                  <a:srgbClr val="004180"/>
+                </a:solidFill>
+              </a:rPr>
+              <a:t>variare</a:t>
+            </a:r>
+            <a:r>
+              <a:rPr lang="en-US" sz="2200" b="1" dirty="0">
+                <a:solidFill>
+                  <a:srgbClr val="004180"/>
+                </a:solidFill>
+              </a:rPr>
+              <a:t> di ρ e β₂</a:t>
+            </a:r>
+            <a:endParaRPr lang="it-IT" sz="2200" b="1">
+              <a:solidFill>
+                <a:srgbClr val="004180"/>
+              </a:solidFill>
               <a:ea typeface="Calibri"/>
               <a:cs typeface="Calibri"/>
             </a:endParaRPr>
           </a:p>
           <a:p>
-            <a:r>
-              <a:rPr lang="it-IT">
-                <a:ea typeface="Calibri"/>
-                <a:cs typeface="Calibri"/>
-              </a:rPr>
-              <a:t>Magari se entra inserire le osservazioni </a:t>
-            </a:r>
-            <a:endParaRPr lang="it-IT" dirty="0">
+            <a:pPr algn="ctr"/>
+            <a:endParaRPr lang="en-US" b="1" dirty="0">
+              <a:solidFill>
+                <a:srgbClr val="000000"/>
+              </a:solidFill>
+              <a:latin typeface="Calibri"/>
               <a:ea typeface="Calibri"/>
               <a:cs typeface="Calibri"/>
             </a:endParaRPr>
           </a:p>
         </p:txBody>
       </p:sp>
+      <p:pic>
+        <p:nvPicPr>
+          <p:cNvPr id="14" name="Immagine 13" descr="Immagine che contiene testo, schermata, Carattere, numero&#10;&#10;Il contenuto generato dall&amp;#39;IA potrebbe non essere corretto.">
+            <a:extLst>
+              <a:ext uri="{FF2B5EF4-FFF2-40B4-BE49-F238E27FC236}">
+                <a16:creationId xmlns:a16="http://schemas.microsoft.com/office/drawing/2014/main" id="{0D763DB7-FD53-9532-4031-008F0FE76C16}"/>
+              </a:ext>
+            </a:extLst>
+          </p:cNvPr>
+          <p:cNvPicPr>
+            <a:picLocks noChangeAspect="1"/>
+          </p:cNvPicPr>
+          <p:nvPr/>
+        </p:nvPicPr>
+        <p:blipFill>
+          <a:blip r:embed="rId4"/>
+          <a:stretch>
+            <a:fillRect/>
+          </a:stretch>
+        </p:blipFill>
+        <p:spPr>
+          <a:xfrm>
+            <a:off x="299495" y="1208831"/>
+            <a:ext cx="3878968" cy="2805413"/>
+          </a:xfrm>
+          <a:prstGeom prst="rect">
+            <a:avLst/>
+          </a:prstGeom>
+          <a:ln>
+            <a:noFill/>
+          </a:ln>
+        </p:spPr>
+      </p:pic>
+      <p:pic>
+        <p:nvPicPr>
+          <p:cNvPr id="15" name="Immagine 14" descr="Immagine che contiene testo, linea, diagramma, Parallelo&#10;&#10;Il contenuto generato dall&amp;#39;IA potrebbe non essere corretto.">
+            <a:extLst>
+              <a:ext uri="{FF2B5EF4-FFF2-40B4-BE49-F238E27FC236}">
+                <a16:creationId xmlns:a16="http://schemas.microsoft.com/office/drawing/2014/main" id="{5B415F3D-6A1E-1BE2-5664-4F243EE4E26B}"/>
+              </a:ext>
+            </a:extLst>
+          </p:cNvPr>
+          <p:cNvPicPr>
+            <a:picLocks noChangeAspect="1"/>
+          </p:cNvPicPr>
+          <p:nvPr/>
+        </p:nvPicPr>
+        <p:blipFill>
+          <a:blip r:embed="rId5"/>
+          <a:srcRect l="-763" t="2765" r="2927" b="2995"/>
+          <a:stretch>
+            <a:fillRect/>
+          </a:stretch>
+        </p:blipFill>
+        <p:spPr>
+          <a:xfrm>
+            <a:off x="4339468" y="1207644"/>
+            <a:ext cx="4748109" cy="3023902"/>
+          </a:xfrm>
+          <a:prstGeom prst="rect">
+            <a:avLst/>
+          </a:prstGeom>
+        </p:spPr>
+      </p:pic>
     </p:spTree>
     <p:extLst>
       <p:ext uri="{BB962C8B-B14F-4D97-AF65-F5344CB8AC3E}">

--- a/Homework1/Presentazione_da_terminare.pptx
+++ b/Homework1/Presentazione_da_terminare.pptx
@@ -1540,8 +1540,8 @@
         </p:nvSpPr>
         <p:spPr>
           <a:xfrm>
-            <a:off x="1849731" y="275709"/>
-            <a:ext cx="6949440" cy="475488"/>
+            <a:off x="3267519" y="155656"/>
+            <a:ext cx="1865671" cy="475488"/>
           </a:xfrm>
           <a:prstGeom prst="rect">
             <a:avLst/>
@@ -1579,7 +1579,7 @@
         </p:nvSpPr>
         <p:spPr>
           <a:xfrm>
-            <a:off x="740722" y="1060878"/>
+            <a:off x="1574006" y="751384"/>
             <a:ext cx="4114800" cy="292608"/>
           </a:xfrm>
           <a:prstGeom prst="rect">
@@ -1624,52 +1624,338 @@
           </a:p>
         </p:txBody>
       </p:sp>
-      <p:sp>
-        <p:nvSpPr>
-          <p:cNvPr id="7" name="Text 5"/>
-          <p:cNvSpPr/>
-          <p:nvPr/>
-        </p:nvSpPr>
-        <p:spPr>
-          <a:xfrm>
-            <a:off x="740722" y="1407944"/>
-            <a:ext cx="4114800" cy="822960"/>
-          </a:xfrm>
-          <a:prstGeom prst="rect">
-            <a:avLst/>
-          </a:prstGeom>
-          <a:noFill/>
-          <a:ln/>
-        </p:spPr>
-        <p:txBody>
-          <a:bodyPr wrap="square" lIns="91440" tIns="45720" rIns="91440" bIns="45720" rtlCol="0" anchor="t"/>
-          <a:lstStyle/>
-          <a:p>
-            <a:pPr marL="342900" indent="-342900">
-              <a:buSzPct val="100000"/>
-              <a:buChar char="•"/>
-            </a:pPr>
-            <a:r>
-              <a:rPr lang="en-US" sz="1100">
-                <a:solidFill>
-                  <a:srgbClr val="333333"/>
-                </a:solidFill>
-                <a:latin typeface="Calibri"/>
-                <a:ea typeface="Calibri"/>
-                <a:cs typeface="Calibri"/>
-              </a:rPr>
-              <a:t>Sono idee lorem ipsum</a:t>
-            </a:r>
-            <a:endParaRPr lang="en-US" sz="1100" dirty="0">
-              <a:solidFill>
-                <a:srgbClr val="333333"/>
-              </a:solidFill>
-              <a:ea typeface="Calibri"/>
-              <a:cs typeface="Calibri"/>
-            </a:endParaRPr>
-          </a:p>
-        </p:txBody>
-      </p:sp>
+      <mc:AlternateContent xmlns:mc="http://schemas.openxmlformats.org/markup-compatibility/2006">
+        <mc:Choice xmlns:a14="http://schemas.microsoft.com/office/drawing/2010/main" Requires="a14">
+          <p:sp>
+            <p:nvSpPr>
+              <p:cNvPr id="7" name="Text 5"/>
+              <p:cNvSpPr/>
+              <p:nvPr/>
+            </p:nvSpPr>
+            <p:spPr>
+              <a:xfrm>
+                <a:off x="457200" y="1008935"/>
+                <a:ext cx="3283552" cy="822960"/>
+              </a:xfrm>
+              <a:prstGeom prst="rect">
+                <a:avLst/>
+              </a:prstGeom>
+              <a:noFill/>
+              <a:ln/>
+            </p:spPr>
+            <p:txBody>
+              <a:bodyPr wrap="square" lIns="91440" tIns="45720" rIns="91440" bIns="45720" rtlCol="0" anchor="t"/>
+              <a:lstStyle/>
+              <a:p>
+                <a:pPr algn="ctr">
+                  <a:buSzPct val="100000"/>
+                </a:pPr>
+                <a:r>
+                  <a:rPr lang="en-US" dirty="0" err="1">
+                    <a:solidFill>
+                      <a:srgbClr val="333333"/>
+                    </a:solidFill>
+                    <a:latin typeface="Calibri"/>
+                    <a:ea typeface="Calibri"/>
+                    <a:cs typeface="Calibri"/>
+                  </a:rPr>
+                  <a:t>Osservare</a:t>
+                </a:r>
+                <a:r>
+                  <a:rPr lang="en-US" dirty="0">
+                    <a:solidFill>
+                      <a:srgbClr val="333333"/>
+                    </a:solidFill>
+                    <a:latin typeface="Calibri"/>
+                    <a:ea typeface="Calibri"/>
+                    <a:cs typeface="Calibri"/>
+                  </a:rPr>
+                  <a:t> </a:t>
+                </a:r>
+                <a:r>
+                  <a:rPr lang="en-US" dirty="0" err="1">
+                    <a:solidFill>
+                      <a:srgbClr val="333333"/>
+                    </a:solidFill>
+                    <a:latin typeface="Calibri"/>
+                    <a:ea typeface="Calibri"/>
+                    <a:cs typeface="Calibri"/>
+                  </a:rPr>
+                  <a:t>l’influenza</a:t>
+                </a:r>
+                <a:r>
+                  <a:rPr lang="en-US" dirty="0">
+                    <a:solidFill>
+                      <a:srgbClr val="333333"/>
+                    </a:solidFill>
+                    <a:latin typeface="Calibri"/>
+                    <a:ea typeface="Calibri"/>
+                    <a:cs typeface="Calibri"/>
+                  </a:rPr>
+                  <a:t> di </a:t>
+                </a:r>
+                <a:r>
+                  <a:rPr lang="en-US" dirty="0" err="1">
+                    <a:solidFill>
+                      <a:srgbClr val="333333"/>
+                    </a:solidFill>
+                    <a:latin typeface="Calibri"/>
+                    <a:ea typeface="Calibri"/>
+                    <a:cs typeface="Calibri"/>
+                  </a:rPr>
+                  <a:t>una</a:t>
+                </a:r>
+                <a:r>
+                  <a:rPr lang="en-US" dirty="0">
+                    <a:solidFill>
+                      <a:srgbClr val="333333"/>
+                    </a:solidFill>
+                    <a:latin typeface="Calibri"/>
+                    <a:ea typeface="Calibri"/>
+                    <a:cs typeface="Calibri"/>
+                  </a:rPr>
+                  <a:t> </a:t>
+                </a:r>
+                <a:r>
+                  <a:rPr lang="en-US" dirty="0" err="1">
+                    <a:solidFill>
+                      <a:srgbClr val="333333"/>
+                    </a:solidFill>
+                    <a:latin typeface="Calibri"/>
+                    <a:ea typeface="Calibri"/>
+                    <a:cs typeface="Calibri"/>
+                  </a:rPr>
+                  <a:t>covariata</a:t>
+                </a:r>
+                <a:r>
+                  <a:rPr lang="en-US" dirty="0">
+                    <a:solidFill>
+                      <a:srgbClr val="333333"/>
+                    </a:solidFill>
+                    <a:latin typeface="Calibri"/>
+                    <a:ea typeface="Calibri"/>
+                    <a:cs typeface="Calibri"/>
+                  </a:rPr>
+                  <a:t> </a:t>
+                </a:r>
+                <a:r>
+                  <a:rPr lang="en-US" dirty="0" err="1">
+                    <a:solidFill>
+                      <a:srgbClr val="333333"/>
+                    </a:solidFill>
+                    <a:latin typeface="Calibri"/>
+                    <a:ea typeface="Calibri"/>
+                    <a:cs typeface="Calibri"/>
+                  </a:rPr>
+                  <a:t>importante</a:t>
+                </a:r>
+                <a:r>
+                  <a:rPr lang="en-US" dirty="0">
+                    <a:solidFill>
+                      <a:srgbClr val="333333"/>
+                    </a:solidFill>
+                    <a:latin typeface="Calibri"/>
+                    <a:ea typeface="Calibri"/>
+                    <a:cs typeface="Calibri"/>
+                  </a:rPr>
+                  <a:t> </a:t>
+                </a:r>
+                <a14:m>
+                  <m:oMath xmlns:m="http://schemas.openxmlformats.org/officeDocument/2006/math">
+                    <m:sSub>
+                      <m:sSubPr>
+                        <m:ctrlPr>
+                          <a:rPr lang="it-IT" b="0" i="1" smtClean="0">
+                            <a:solidFill>
+                              <a:srgbClr val="333333"/>
+                            </a:solidFill>
+                            <a:latin typeface="Cambria Math" panose="02040503050406030204" pitchFamily="18" charset="0"/>
+                            <a:ea typeface="Calibri"/>
+                            <a:cs typeface="Calibri"/>
+                          </a:rPr>
+                        </m:ctrlPr>
+                      </m:sSubPr>
+                      <m:e>
+                        <m:r>
+                          <a:rPr lang="it-IT" b="0" i="1" smtClean="0">
+                            <a:solidFill>
+                              <a:srgbClr val="333333"/>
+                            </a:solidFill>
+                            <a:latin typeface="Cambria Math" panose="02040503050406030204" pitchFamily="18" charset="0"/>
+                            <a:ea typeface="Calibri"/>
+                            <a:cs typeface="Calibri"/>
+                          </a:rPr>
+                          <m:t>(</m:t>
+                        </m:r>
+                        <m:r>
+                          <a:rPr lang="it-IT" b="0" i="1" smtClean="0">
+                            <a:solidFill>
+                              <a:srgbClr val="333333"/>
+                            </a:solidFill>
+                            <a:latin typeface="Cambria Math" panose="02040503050406030204" pitchFamily="18" charset="0"/>
+                            <a:ea typeface="Calibri"/>
+                            <a:cs typeface="Calibri"/>
+                          </a:rPr>
+                          <m:t>𝛽</m:t>
+                        </m:r>
+                      </m:e>
+                      <m:sub>
+                        <m:r>
+                          <a:rPr lang="it-IT" b="0" i="1" smtClean="0">
+                            <a:solidFill>
+                              <a:srgbClr val="333333"/>
+                            </a:solidFill>
+                            <a:latin typeface="Cambria Math" panose="02040503050406030204" pitchFamily="18" charset="0"/>
+                            <a:ea typeface="Calibri"/>
+                            <a:cs typeface="Calibri"/>
+                          </a:rPr>
+                          <m:t>2</m:t>
+                        </m:r>
+                      </m:sub>
+                    </m:sSub>
+                    <m:r>
+                      <a:rPr lang="it-IT" b="0" i="1" smtClean="0">
+                        <a:solidFill>
+                          <a:srgbClr val="333333"/>
+                        </a:solidFill>
+                        <a:latin typeface="Cambria Math" panose="02040503050406030204" pitchFamily="18" charset="0"/>
+                        <a:ea typeface="Calibri"/>
+                        <a:cs typeface="Calibri"/>
+                      </a:rPr>
+                      <m:t>)</m:t>
+                    </m:r>
+                  </m:oMath>
+                </a14:m>
+                <a:r>
+                  <a:rPr lang="en-US" dirty="0">
+                    <a:solidFill>
+                      <a:srgbClr val="333333"/>
+                    </a:solidFill>
+                    <a:latin typeface="Calibri"/>
+                    <a:ea typeface="Calibri"/>
+                    <a:cs typeface="Calibri"/>
+                  </a:rPr>
+                  <a:t> </a:t>
+                </a:r>
+                <a:r>
+                  <a:rPr lang="en-US" dirty="0" err="1">
+                    <a:solidFill>
+                      <a:srgbClr val="333333"/>
+                    </a:solidFill>
+                    <a:latin typeface="Calibri"/>
+                    <a:ea typeface="Calibri"/>
+                    <a:cs typeface="Calibri"/>
+                  </a:rPr>
+                  <a:t>all’interno</a:t>
+                </a:r>
+                <a:r>
+                  <a:rPr lang="en-US" dirty="0">
+                    <a:solidFill>
+                      <a:srgbClr val="333333"/>
+                    </a:solidFill>
+                    <a:latin typeface="Calibri"/>
+                    <a:ea typeface="Calibri"/>
+                    <a:cs typeface="Calibri"/>
+                  </a:rPr>
+                  <a:t> di un </a:t>
+                </a:r>
+                <a:r>
+                  <a:rPr lang="en-US" dirty="0" err="1">
+                    <a:solidFill>
+                      <a:srgbClr val="333333"/>
+                    </a:solidFill>
+                    <a:latin typeface="Calibri"/>
+                    <a:ea typeface="Calibri"/>
+                    <a:cs typeface="Calibri"/>
+                  </a:rPr>
+                  <a:t>modello</a:t>
+                </a:r>
+                <a:r>
+                  <a:rPr lang="en-US" dirty="0">
+                    <a:solidFill>
+                      <a:srgbClr val="333333"/>
+                    </a:solidFill>
+                    <a:latin typeface="Calibri"/>
+                    <a:ea typeface="Calibri"/>
+                    <a:cs typeface="Calibri"/>
+                  </a:rPr>
+                  <a:t> </a:t>
+                </a:r>
+                <a:r>
+                  <a:rPr lang="en-US" dirty="0" err="1">
+                    <a:solidFill>
+                      <a:srgbClr val="333333"/>
+                    </a:solidFill>
+                    <a:latin typeface="Calibri"/>
+                    <a:ea typeface="Calibri"/>
+                    <a:cs typeface="Calibri"/>
+                  </a:rPr>
+                  <a:t>statistico</a:t>
+                </a:r>
+                <a:endParaRPr lang="en-US" dirty="0">
+                  <a:solidFill>
+                    <a:srgbClr val="333333"/>
+                  </a:solidFill>
+                  <a:latin typeface="Calibri"/>
+                  <a:ea typeface="Calibri"/>
+                  <a:cs typeface="Calibri"/>
+                </a:endParaRPr>
+              </a:p>
+              <a:p>
+                <a:pPr>
+                  <a:buSzPct val="100000"/>
+                </a:pPr>
+                <a:endParaRPr lang="en-US" sz="1100" dirty="0">
+                  <a:solidFill>
+                    <a:srgbClr val="333333"/>
+                  </a:solidFill>
+                  <a:ea typeface="Calibri"/>
+                  <a:cs typeface="Calibri"/>
+                </a:endParaRPr>
+              </a:p>
+            </p:txBody>
+          </p:sp>
+        </mc:Choice>
+        <mc:Fallback>
+          <p:sp>
+            <p:nvSpPr>
+              <p:cNvPr id="7" name="Text 5"/>
+              <p:cNvSpPr>
+                <a:spLocks noRot="1" noChangeAspect="1" noMove="1" noResize="1" noEditPoints="1" noAdjustHandles="1" noChangeArrowheads="1" noChangeShapeType="1" noTextEdit="1"/>
+              </p:cNvSpPr>
+              <p:nvPr/>
+            </p:nvSpPr>
+            <p:spPr>
+              <a:xfrm>
+                <a:off x="457200" y="1008935"/>
+                <a:ext cx="3283552" cy="822960"/>
+              </a:xfrm>
+              <a:prstGeom prst="rect">
+                <a:avLst/>
+              </a:prstGeom>
+              <a:blipFill>
+                <a:blip r:embed="rId3"/>
+                <a:stretch>
+                  <a:fillRect t="-4444" b="-56296"/>
+                </a:stretch>
+              </a:blipFill>
+              <a:ln/>
+            </p:spPr>
+            <p:txBody>
+              <a:bodyPr/>
+              <a:lstStyle/>
+              <a:p>
+                <a:r>
+                  <a:rPr lang="it-IT">
+                    <a:noFill/>
+                  </a:rPr>
+                  <a:t> </a:t>
+                </a:r>
+              </a:p>
+            </p:txBody>
+          </p:sp>
+        </mc:Fallback>
+      </mc:AlternateContent>
       <p:sp>
         <p:nvSpPr>
           <p:cNvPr id="8" name="Text 6"/>
@@ -1678,7 +1964,7 @@
         </p:nvSpPr>
         <p:spPr>
           <a:xfrm>
-            <a:off x="740722" y="2264066"/>
+            <a:off x="5939529" y="769672"/>
             <a:ext cx="4114800" cy="274320"/>
           </a:xfrm>
           <a:prstGeom prst="rect">
@@ -1807,7 +2093,7 @@
           <p:nvPr/>
         </p:nvPicPr>
         <p:blipFill>
-          <a:blip r:embed="rId3"/>
+          <a:blip r:embed="rId4"/>
           <a:srcRect l="-1348" t="25421" r="-1064" b="-929"/>
           <a:stretch>
             <a:fillRect/>
@@ -1837,8 +2123,8 @@
         </p:nvSpPr>
         <p:spPr>
           <a:xfrm>
-            <a:off x="739635" y="2679794"/>
-            <a:ext cx="3453636" cy="369332"/>
+            <a:off x="5631678" y="1077184"/>
+            <a:ext cx="3143612" cy="923330"/>
           </a:xfrm>
           <a:prstGeom prst="rect">
             <a:avLst/>
@@ -1854,37 +2140,880 @@
           </a:bodyPr>
           <a:lstStyle/>
           <a:p>
-            <a:r>
-              <a:rPr lang="it-IT" dirty="0" err="1">
-                <a:ea typeface="Calibri"/>
-                <a:cs typeface="Calibri"/>
-              </a:rPr>
-              <a:t>Lorem</a:t>
-            </a:r>
+            <a:pPr marL="285750" indent="-285750">
+              <a:buFont typeface="Arial" panose="020B0604020202020204" pitchFamily="34" charset="0"/>
+              <a:buChar char="•"/>
+            </a:pPr>
             <a:r>
               <a:rPr lang="it-IT" dirty="0">
                 <a:ea typeface="Calibri"/>
                 <a:cs typeface="Calibri"/>
               </a:rPr>
+              <a:t>DGP</a:t>
+            </a:r>
+            <a:endParaRPr lang="it-IT" b="0" dirty="0">
+              <a:ea typeface="Calibri"/>
+              <a:cs typeface="Calibri"/>
+            </a:endParaRPr>
+          </a:p>
+          <a:p>
+            <a:pPr marL="285750" indent="-285750">
+              <a:buFont typeface="Arial" panose="020B0604020202020204" pitchFamily="34" charset="0"/>
+              <a:buChar char="•"/>
+            </a:pPr>
+            <a:r>
+              <a:rPr lang="it-IT" dirty="0"/>
+              <a:t>Scenari e Monte Carlo</a:t>
+            </a:r>
+          </a:p>
+          <a:p>
+            <a:pPr marL="285750" indent="-285750">
+              <a:buFont typeface="Arial" panose="020B0604020202020204" pitchFamily="34" charset="0"/>
+              <a:buChar char="•"/>
+            </a:pPr>
+            <a:r>
+              <a:rPr lang="it-IT" dirty="0"/>
+              <a:t>Convergenza e </a:t>
+            </a:r>
+            <a:r>
+              <a:rPr lang="it-IT" dirty="0" err="1"/>
+              <a:t>Bias</a:t>
+            </a:r>
+            <a:r>
+              <a:rPr lang="it-IT" dirty="0"/>
               <a:t> </a:t>
             </a:r>
-            <a:r>
-              <a:rPr lang="it-IT" dirty="0" err="1">
-                <a:ea typeface="Calibri"/>
-                <a:cs typeface="Calibri"/>
-              </a:rPr>
-              <a:t>ipsum</a:t>
-            </a:r>
-            <a:endParaRPr lang="it-IT" dirty="0" err="1"/>
           </a:p>
         </p:txBody>
       </p:sp>
+      <mc:AlternateContent xmlns:mc="http://schemas.openxmlformats.org/markup-compatibility/2006">
+        <mc:Choice xmlns:a14="http://schemas.microsoft.com/office/drawing/2010/main" Requires="a14">
+          <p:sp>
+            <p:nvSpPr>
+              <p:cNvPr id="2" name="CasellaDiTesto 1">
+                <a:extLst>
+                  <a:ext uri="{FF2B5EF4-FFF2-40B4-BE49-F238E27FC236}">
+                    <a16:creationId xmlns:a16="http://schemas.microsoft.com/office/drawing/2014/main" id="{A6946149-05AB-76FF-3F2B-B4F8C2F2BCE7}"/>
+                  </a:ext>
+                </a:extLst>
+              </p:cNvPr>
+              <p:cNvSpPr txBox="1"/>
+              <p:nvPr/>
+            </p:nvSpPr>
+            <p:spPr>
+              <a:xfrm>
+                <a:off x="2634878" y="2964835"/>
+                <a:ext cx="3373872" cy="388889"/>
+              </a:xfrm>
+              <a:prstGeom prst="rect">
+                <a:avLst/>
+              </a:prstGeom>
+              <a:noFill/>
+            </p:spPr>
+            <p:txBody>
+              <a:bodyPr wrap="none" rtlCol="0">
+                <a:spAutoFit/>
+              </a:bodyPr>
+              <a:lstStyle/>
+              <a:p>
+                <a14:m>
+                  <m:oMathPara xmlns:m="http://schemas.openxmlformats.org/officeDocument/2006/math">
+                    <m:oMathParaPr>
+                      <m:jc m:val="centerGroup"/>
+                    </m:oMathParaPr>
+                    <m:oMath xmlns:m="http://schemas.openxmlformats.org/officeDocument/2006/math">
+                      <m:sSub>
+                        <m:sSubPr>
+                          <m:ctrlPr>
+                            <a:rPr lang="it-IT" i="1" smtClean="0">
+                              <a:latin typeface="Cambria Math" panose="02040503050406030204" pitchFamily="18" charset="0"/>
+                              <a:ea typeface="Calibri"/>
+                              <a:cs typeface="Calibri"/>
+                            </a:rPr>
+                          </m:ctrlPr>
+                        </m:sSubPr>
+                        <m:e>
+                          <m:r>
+                            <a:rPr lang="it-IT" i="1">
+                              <a:latin typeface="Cambria Math" panose="02040503050406030204" pitchFamily="18" charset="0"/>
+                              <a:ea typeface="Calibri"/>
+                              <a:cs typeface="Calibri"/>
+                            </a:rPr>
+                            <m:t>𝑦</m:t>
+                          </m:r>
+                        </m:e>
+                        <m:sub>
+                          <m:r>
+                            <a:rPr lang="it-IT" i="1">
+                              <a:latin typeface="Cambria Math" panose="02040503050406030204" pitchFamily="18" charset="0"/>
+                              <a:ea typeface="Calibri"/>
+                              <a:cs typeface="Calibri"/>
+                            </a:rPr>
+                            <m:t>𝑖</m:t>
+                          </m:r>
+                        </m:sub>
+                      </m:sSub>
+                      <m:r>
+                        <a:rPr lang="it-IT" i="1">
+                          <a:latin typeface="Cambria Math" panose="02040503050406030204" pitchFamily="18" charset="0"/>
+                          <a:ea typeface="Calibri"/>
+                          <a:cs typeface="Calibri"/>
+                        </a:rPr>
+                        <m:t>=</m:t>
+                      </m:r>
+                      <m:sSub>
+                        <m:sSubPr>
+                          <m:ctrlPr>
+                            <a:rPr lang="it-IT" i="1">
+                              <a:latin typeface="Cambria Math" panose="02040503050406030204" pitchFamily="18" charset="0"/>
+                              <a:ea typeface="Calibri"/>
+                              <a:cs typeface="Calibri"/>
+                            </a:rPr>
+                          </m:ctrlPr>
+                        </m:sSubPr>
+                        <m:e>
+                          <m:r>
+                            <a:rPr lang="it-IT" i="1">
+                              <a:latin typeface="Cambria Math" panose="02040503050406030204" pitchFamily="18" charset="0"/>
+                              <a:ea typeface="Calibri"/>
+                              <a:cs typeface="Calibri"/>
+                            </a:rPr>
+                            <m:t>𝛽</m:t>
+                          </m:r>
+                        </m:e>
+                        <m:sub>
+                          <m:r>
+                            <a:rPr lang="it-IT" i="1">
+                              <a:latin typeface="Cambria Math" panose="02040503050406030204" pitchFamily="18" charset="0"/>
+                              <a:ea typeface="Calibri"/>
+                              <a:cs typeface="Calibri"/>
+                            </a:rPr>
+                            <m:t>0</m:t>
+                          </m:r>
+                        </m:sub>
+                      </m:sSub>
+                      <m:r>
+                        <a:rPr lang="it-IT" i="1">
+                          <a:latin typeface="Cambria Math" panose="02040503050406030204" pitchFamily="18" charset="0"/>
+                          <a:ea typeface="Calibri"/>
+                          <a:cs typeface="Calibri"/>
+                        </a:rPr>
+                        <m:t>+</m:t>
+                      </m:r>
+                      <m:sSub>
+                        <m:sSubPr>
+                          <m:ctrlPr>
+                            <a:rPr lang="it-IT" i="1">
+                              <a:latin typeface="Cambria Math" panose="02040503050406030204" pitchFamily="18" charset="0"/>
+                              <a:ea typeface="Calibri"/>
+                              <a:cs typeface="Calibri"/>
+                            </a:rPr>
+                          </m:ctrlPr>
+                        </m:sSubPr>
+                        <m:e>
+                          <m:r>
+                            <a:rPr lang="it-IT" i="1">
+                              <a:latin typeface="Cambria Math" panose="02040503050406030204" pitchFamily="18" charset="0"/>
+                              <a:ea typeface="Calibri"/>
+                              <a:cs typeface="Calibri"/>
+                            </a:rPr>
+                            <m:t>𝛽</m:t>
+                          </m:r>
+                        </m:e>
+                        <m:sub>
+                          <m:r>
+                            <a:rPr lang="it-IT" i="1">
+                              <a:latin typeface="Cambria Math" panose="02040503050406030204" pitchFamily="18" charset="0"/>
+                              <a:ea typeface="Calibri"/>
+                              <a:cs typeface="Calibri"/>
+                            </a:rPr>
+                            <m:t>1</m:t>
+                          </m:r>
+                        </m:sub>
+                      </m:sSub>
+                      <m:sSub>
+                        <m:sSubPr>
+                          <m:ctrlPr>
+                            <a:rPr lang="it-IT" i="1">
+                              <a:latin typeface="Cambria Math" panose="02040503050406030204" pitchFamily="18" charset="0"/>
+                              <a:ea typeface="Calibri"/>
+                              <a:cs typeface="Calibri"/>
+                            </a:rPr>
+                          </m:ctrlPr>
+                        </m:sSubPr>
+                        <m:e>
+                          <m:r>
+                            <a:rPr lang="it-IT" i="1">
+                              <a:latin typeface="Cambria Math" panose="02040503050406030204" pitchFamily="18" charset="0"/>
+                              <a:ea typeface="Calibri"/>
+                              <a:cs typeface="Calibri"/>
+                            </a:rPr>
+                            <m:t>𝑥</m:t>
+                          </m:r>
+                        </m:e>
+                        <m:sub>
+                          <m:d>
+                            <m:dPr>
+                              <m:ctrlPr>
+                                <a:rPr lang="it-IT" i="1">
+                                  <a:latin typeface="Cambria Math" panose="02040503050406030204" pitchFamily="18" charset="0"/>
+                                  <a:ea typeface="Calibri"/>
+                                  <a:cs typeface="Calibri"/>
+                                </a:rPr>
+                              </m:ctrlPr>
+                            </m:dPr>
+                            <m:e>
+                              <m:r>
+                                <a:rPr lang="it-IT" i="1">
+                                  <a:latin typeface="Cambria Math" panose="02040503050406030204" pitchFamily="18" charset="0"/>
+                                  <a:ea typeface="Calibri"/>
+                                  <a:cs typeface="Calibri"/>
+                                </a:rPr>
+                                <m:t>1,</m:t>
+                              </m:r>
+                              <m:r>
+                                <a:rPr lang="it-IT" i="1">
+                                  <a:latin typeface="Cambria Math" panose="02040503050406030204" pitchFamily="18" charset="0"/>
+                                  <a:ea typeface="Calibri"/>
+                                  <a:cs typeface="Calibri"/>
+                                </a:rPr>
+                                <m:t>𝑖</m:t>
+                              </m:r>
+                            </m:e>
+                          </m:d>
+                        </m:sub>
+                      </m:sSub>
+                      <m:r>
+                        <a:rPr lang="it-IT" i="1">
+                          <a:latin typeface="Cambria Math" panose="02040503050406030204" pitchFamily="18" charset="0"/>
+                          <a:ea typeface="Calibri"/>
+                          <a:cs typeface="Calibri"/>
+                        </a:rPr>
+                        <m:t>+</m:t>
+                      </m:r>
+                      <m:sSub>
+                        <m:sSubPr>
+                          <m:ctrlPr>
+                            <a:rPr lang="it-IT" i="1">
+                              <a:latin typeface="Cambria Math" panose="02040503050406030204" pitchFamily="18" charset="0"/>
+                              <a:ea typeface="Calibri"/>
+                              <a:cs typeface="Calibri"/>
+                            </a:rPr>
+                          </m:ctrlPr>
+                        </m:sSubPr>
+                        <m:e>
+                          <m:r>
+                            <a:rPr lang="it-IT" i="1">
+                              <a:latin typeface="Cambria Math" panose="02040503050406030204" pitchFamily="18" charset="0"/>
+                              <a:ea typeface="Calibri"/>
+                              <a:cs typeface="Calibri"/>
+                            </a:rPr>
+                            <m:t>𝛽</m:t>
+                          </m:r>
+                        </m:e>
+                        <m:sub>
+                          <m:r>
+                            <a:rPr lang="it-IT" i="1">
+                              <a:latin typeface="Cambria Math" panose="02040503050406030204" pitchFamily="18" charset="0"/>
+                              <a:ea typeface="Calibri"/>
+                              <a:cs typeface="Calibri"/>
+                            </a:rPr>
+                            <m:t>2</m:t>
+                          </m:r>
+                        </m:sub>
+                      </m:sSub>
+                      <m:sSub>
+                        <m:sSubPr>
+                          <m:ctrlPr>
+                            <a:rPr lang="it-IT" i="1">
+                              <a:latin typeface="Cambria Math" panose="02040503050406030204" pitchFamily="18" charset="0"/>
+                              <a:ea typeface="Calibri"/>
+                              <a:cs typeface="Calibri"/>
+                            </a:rPr>
+                          </m:ctrlPr>
+                        </m:sSubPr>
+                        <m:e>
+                          <m:r>
+                            <a:rPr lang="it-IT" i="1">
+                              <a:latin typeface="Cambria Math" panose="02040503050406030204" pitchFamily="18" charset="0"/>
+                              <a:ea typeface="Calibri"/>
+                              <a:cs typeface="Calibri"/>
+                            </a:rPr>
+                            <m:t>𝑥</m:t>
+                          </m:r>
+                        </m:e>
+                        <m:sub>
+                          <m:d>
+                            <m:dPr>
+                              <m:ctrlPr>
+                                <a:rPr lang="it-IT" i="1">
+                                  <a:latin typeface="Cambria Math" panose="02040503050406030204" pitchFamily="18" charset="0"/>
+                                  <a:ea typeface="Calibri"/>
+                                  <a:cs typeface="Calibri"/>
+                                </a:rPr>
+                              </m:ctrlPr>
+                            </m:dPr>
+                            <m:e>
+                              <m:r>
+                                <a:rPr lang="it-IT" i="1">
+                                  <a:latin typeface="Cambria Math" panose="02040503050406030204" pitchFamily="18" charset="0"/>
+                                  <a:ea typeface="Calibri"/>
+                                  <a:cs typeface="Calibri"/>
+                                </a:rPr>
+                                <m:t>2,</m:t>
+                              </m:r>
+                              <m:r>
+                                <a:rPr lang="it-IT" i="1">
+                                  <a:latin typeface="Cambria Math" panose="02040503050406030204" pitchFamily="18" charset="0"/>
+                                  <a:ea typeface="Calibri"/>
+                                  <a:cs typeface="Calibri"/>
+                                </a:rPr>
+                                <m:t>𝑖</m:t>
+                              </m:r>
+                            </m:e>
+                          </m:d>
+                        </m:sub>
+                      </m:sSub>
+                      <m:r>
+                        <a:rPr lang="it-IT" i="1">
+                          <a:latin typeface="Cambria Math" panose="02040503050406030204" pitchFamily="18" charset="0"/>
+                          <a:ea typeface="Calibri"/>
+                          <a:cs typeface="Calibri"/>
+                        </a:rPr>
+                        <m:t>+</m:t>
+                      </m:r>
+                      <m:sSub>
+                        <m:sSubPr>
+                          <m:ctrlPr>
+                            <a:rPr lang="it-IT" b="0" i="1" smtClean="0">
+                              <a:latin typeface="Cambria Math" panose="02040503050406030204" pitchFamily="18" charset="0"/>
+                              <a:ea typeface="Calibri"/>
+                              <a:cs typeface="Calibri"/>
+                            </a:rPr>
+                          </m:ctrlPr>
+                        </m:sSubPr>
+                        <m:e>
+                          <m:r>
+                            <m:rPr>
+                              <m:sty m:val="p"/>
+                            </m:rPr>
+                            <a:rPr lang="it-IT" b="0" i="1" smtClean="0">
+                              <a:latin typeface="Cambria Math" panose="02040503050406030204" pitchFamily="18" charset="0"/>
+                              <a:ea typeface="Calibri"/>
+                              <a:cs typeface="Calibri"/>
+                            </a:rPr>
+                            <m:t>ε</m:t>
+                          </m:r>
+                        </m:e>
+                        <m:sub>
+                          <m:r>
+                            <a:rPr lang="it-IT" b="0" i="1" smtClean="0">
+                              <a:latin typeface="Cambria Math" panose="02040503050406030204" pitchFamily="18" charset="0"/>
+                              <a:ea typeface="Calibri"/>
+                              <a:cs typeface="Calibri"/>
+                            </a:rPr>
+                            <m:t>𝑖</m:t>
+                          </m:r>
+                        </m:sub>
+                      </m:sSub>
+                    </m:oMath>
+                  </m:oMathPara>
+                </a14:m>
+                <a:endParaRPr lang="it-IT" dirty="0"/>
+              </a:p>
+            </p:txBody>
+          </p:sp>
+        </mc:Choice>
+        <mc:Fallback>
+          <p:sp>
+            <p:nvSpPr>
+              <p:cNvPr id="2" name="CasellaDiTesto 1">
+                <a:extLst>
+                  <a:ext uri="{FF2B5EF4-FFF2-40B4-BE49-F238E27FC236}">
+                    <a16:creationId xmlns:a16="http://schemas.microsoft.com/office/drawing/2014/main" id="{A6946149-05AB-76FF-3F2B-B4F8C2F2BCE7}"/>
+                  </a:ext>
+                </a:extLst>
+              </p:cNvPr>
+              <p:cNvSpPr txBox="1">
+                <a:spLocks noRot="1" noChangeAspect="1" noMove="1" noResize="1" noEditPoints="1" noAdjustHandles="1" noChangeArrowheads="1" noChangeShapeType="1" noTextEdit="1"/>
+              </p:cNvSpPr>
+              <p:nvPr/>
+            </p:nvSpPr>
+            <p:spPr>
+              <a:xfrm>
+                <a:off x="2634878" y="2964835"/>
+                <a:ext cx="3373872" cy="388889"/>
+              </a:xfrm>
+              <a:prstGeom prst="rect">
+                <a:avLst/>
+              </a:prstGeom>
+              <a:blipFill>
+                <a:blip r:embed="rId5"/>
+                <a:stretch>
+                  <a:fillRect b="-9375"/>
+                </a:stretch>
+              </a:blipFill>
+            </p:spPr>
+            <p:txBody>
+              <a:bodyPr/>
+              <a:lstStyle/>
+              <a:p>
+                <a:r>
+                  <a:rPr lang="it-IT">
+                    <a:noFill/>
+                  </a:rPr>
+                  <a:t> </a:t>
+                </a:r>
+              </a:p>
+            </p:txBody>
+          </p:sp>
+        </mc:Fallback>
+      </mc:AlternateContent>
+      <mc:AlternateContent xmlns:mc="http://schemas.openxmlformats.org/markup-compatibility/2006">
+        <mc:Choice xmlns:a14="http://schemas.microsoft.com/office/drawing/2010/main" Requires="a14">
+          <p:sp>
+            <p:nvSpPr>
+              <p:cNvPr id="11" name="CasellaDiTesto 10">
+                <a:extLst>
+                  <a:ext uri="{FF2B5EF4-FFF2-40B4-BE49-F238E27FC236}">
+                    <a16:creationId xmlns:a16="http://schemas.microsoft.com/office/drawing/2014/main" id="{B1960039-73F9-3EB8-B2A9-92719AADB30E}"/>
+                  </a:ext>
+                </a:extLst>
+              </p:cNvPr>
+              <p:cNvSpPr txBox="1"/>
+              <p:nvPr/>
+            </p:nvSpPr>
+            <p:spPr>
+              <a:xfrm>
+                <a:off x="3821196" y="3485869"/>
+                <a:ext cx="1001236" cy="276999"/>
+              </a:xfrm>
+              <a:prstGeom prst="rect">
+                <a:avLst/>
+              </a:prstGeom>
+              <a:noFill/>
+            </p:spPr>
+            <p:txBody>
+              <a:bodyPr wrap="none" lIns="0" tIns="0" rIns="0" bIns="0" rtlCol="0">
+                <a:spAutoFit/>
+              </a:bodyPr>
+              <a:lstStyle/>
+              <a:p>
+                <a14:m>
+                  <m:oMathPara xmlns:m="http://schemas.openxmlformats.org/officeDocument/2006/math">
+                    <m:oMathParaPr>
+                      <m:jc m:val="centerGroup"/>
+                    </m:oMathParaPr>
+                    <m:oMath xmlns:m="http://schemas.openxmlformats.org/officeDocument/2006/math">
+                      <m:r>
+                        <a:rPr lang="it-IT" b="0" i="1" smtClean="0">
+                          <a:latin typeface="Cambria Math" panose="02040503050406030204" pitchFamily="18" charset="0"/>
+                        </a:rPr>
+                        <m:t>𝜀</m:t>
+                      </m:r>
+                      <m:r>
+                        <a:rPr lang="it-IT" b="0" i="1" smtClean="0">
+                          <a:latin typeface="Cambria Math" panose="02040503050406030204" pitchFamily="18" charset="0"/>
+                          <a:ea typeface="Cambria Math" panose="02040503050406030204" pitchFamily="18" charset="0"/>
+                        </a:rPr>
+                        <m:t>~</m:t>
+                      </m:r>
+                      <m:r>
+                        <a:rPr lang="it-IT" b="0" i="1" smtClean="0">
+                          <a:latin typeface="Cambria Math" panose="02040503050406030204" pitchFamily="18" charset="0"/>
+                          <a:ea typeface="Cambria Math" panose="02040503050406030204" pitchFamily="18" charset="0"/>
+                        </a:rPr>
+                        <m:t>𝑁</m:t>
+                      </m:r>
+                      <m:d>
+                        <m:dPr>
+                          <m:ctrlPr>
+                            <a:rPr lang="it-IT" b="0" i="1" smtClean="0">
+                              <a:latin typeface="Cambria Math" panose="02040503050406030204" pitchFamily="18" charset="0"/>
+                              <a:ea typeface="Cambria Math" panose="02040503050406030204" pitchFamily="18" charset="0"/>
+                            </a:rPr>
+                          </m:ctrlPr>
+                        </m:dPr>
+                        <m:e>
+                          <m:r>
+                            <a:rPr lang="it-IT" b="0" i="1" smtClean="0">
+                              <a:latin typeface="Cambria Math" panose="02040503050406030204" pitchFamily="18" charset="0"/>
+                              <a:ea typeface="Cambria Math" panose="02040503050406030204" pitchFamily="18" charset="0"/>
+                            </a:rPr>
+                            <m:t>0,1</m:t>
+                          </m:r>
+                        </m:e>
+                      </m:d>
+                    </m:oMath>
+                  </m:oMathPara>
+                </a14:m>
+                <a:endParaRPr lang="it-IT" dirty="0"/>
+              </a:p>
+            </p:txBody>
+          </p:sp>
+        </mc:Choice>
+        <mc:Fallback>
+          <p:sp>
+            <p:nvSpPr>
+              <p:cNvPr id="11" name="CasellaDiTesto 10">
+                <a:extLst>
+                  <a:ext uri="{FF2B5EF4-FFF2-40B4-BE49-F238E27FC236}">
+                    <a16:creationId xmlns:a16="http://schemas.microsoft.com/office/drawing/2014/main" id="{B1960039-73F9-3EB8-B2A9-92719AADB30E}"/>
+                  </a:ext>
+                </a:extLst>
+              </p:cNvPr>
+              <p:cNvSpPr txBox="1">
+                <a:spLocks noRot="1" noChangeAspect="1" noMove="1" noResize="1" noEditPoints="1" noAdjustHandles="1" noChangeArrowheads="1" noChangeShapeType="1" noTextEdit="1"/>
+              </p:cNvSpPr>
+              <p:nvPr/>
+            </p:nvSpPr>
+            <p:spPr>
+              <a:xfrm>
+                <a:off x="3821196" y="3485869"/>
+                <a:ext cx="1001236" cy="276999"/>
+              </a:xfrm>
+              <a:prstGeom prst="rect">
+                <a:avLst/>
+              </a:prstGeom>
+              <a:blipFill>
+                <a:blip r:embed="rId6"/>
+                <a:stretch>
+                  <a:fillRect l="-3049" b="-6667"/>
+                </a:stretch>
+              </a:blipFill>
+            </p:spPr>
+            <p:txBody>
+              <a:bodyPr/>
+              <a:lstStyle/>
+              <a:p>
+                <a:r>
+                  <a:rPr lang="it-IT">
+                    <a:noFill/>
+                  </a:rPr>
+                  <a:t> </a:t>
+                </a:r>
+              </a:p>
+            </p:txBody>
+          </p:sp>
+        </mc:Fallback>
+      </mc:AlternateContent>
+      <mc:AlternateContent xmlns:mc="http://schemas.openxmlformats.org/markup-compatibility/2006">
+        <mc:Choice xmlns:a14="http://schemas.microsoft.com/office/drawing/2010/main" Requires="a14">
+          <p:sp>
+            <p:nvSpPr>
+              <p:cNvPr id="12" name="CasellaDiTesto 11">
+                <a:extLst>
+                  <a:ext uri="{FF2B5EF4-FFF2-40B4-BE49-F238E27FC236}">
+                    <a16:creationId xmlns:a16="http://schemas.microsoft.com/office/drawing/2014/main" id="{C17C5DED-FBB2-A515-5FD9-A56E30EEE83B}"/>
+                  </a:ext>
+                </a:extLst>
+              </p:cNvPr>
+              <p:cNvSpPr txBox="1"/>
+              <p:nvPr/>
+            </p:nvSpPr>
+            <p:spPr>
+              <a:xfrm>
+                <a:off x="3510438" y="3902546"/>
+                <a:ext cx="1622752" cy="276999"/>
+              </a:xfrm>
+              <a:prstGeom prst="rect">
+                <a:avLst/>
+              </a:prstGeom>
+              <a:noFill/>
+            </p:spPr>
+            <p:txBody>
+              <a:bodyPr wrap="none" lIns="0" tIns="0" rIns="0" bIns="0" rtlCol="0">
+                <a:spAutoFit/>
+              </a:bodyPr>
+              <a:lstStyle/>
+              <a:p>
+                <a14:m>
+                  <m:oMathPara xmlns:m="http://schemas.openxmlformats.org/officeDocument/2006/math">
+                    <m:oMathParaPr>
+                      <m:jc m:val="centerGroup"/>
+                    </m:oMathParaPr>
+                    <m:oMath xmlns:m="http://schemas.openxmlformats.org/officeDocument/2006/math">
+                      <m:sSub>
+                        <m:sSubPr>
+                          <m:ctrlPr>
+                            <a:rPr lang="it-IT" b="0" i="1" smtClean="0">
+                              <a:latin typeface="Cambria Math" panose="02040503050406030204" pitchFamily="18" charset="0"/>
+                            </a:rPr>
+                          </m:ctrlPr>
+                        </m:sSubPr>
+                        <m:e>
+                          <m:r>
+                            <a:rPr lang="it-IT" b="0" i="1" smtClean="0">
+                              <a:latin typeface="Cambria Math" panose="02040503050406030204" pitchFamily="18" charset="0"/>
+                            </a:rPr>
+                            <m:t>𝑥</m:t>
+                          </m:r>
+                        </m:e>
+                        <m:sub>
+                          <m:r>
+                            <a:rPr lang="it-IT" b="0" i="1" smtClean="0">
+                              <a:latin typeface="Cambria Math" panose="02040503050406030204" pitchFamily="18" charset="0"/>
+                            </a:rPr>
+                            <m:t>1</m:t>
+                          </m:r>
+                        </m:sub>
+                      </m:sSub>
+                      <m:r>
+                        <a:rPr lang="it-IT" b="0" i="1" smtClean="0">
+                          <a:latin typeface="Cambria Math" panose="02040503050406030204" pitchFamily="18" charset="0"/>
+                        </a:rPr>
+                        <m:t>,</m:t>
+                      </m:r>
+                      <m:sSub>
+                        <m:sSubPr>
+                          <m:ctrlPr>
+                            <a:rPr lang="it-IT" b="0" i="1" smtClean="0">
+                              <a:latin typeface="Cambria Math" panose="02040503050406030204" pitchFamily="18" charset="0"/>
+                            </a:rPr>
+                          </m:ctrlPr>
+                        </m:sSubPr>
+                        <m:e>
+                          <m:r>
+                            <a:rPr lang="it-IT" b="0" i="1" smtClean="0">
+                              <a:latin typeface="Cambria Math" panose="02040503050406030204" pitchFamily="18" charset="0"/>
+                            </a:rPr>
+                            <m:t>𝑥</m:t>
+                          </m:r>
+                        </m:e>
+                        <m:sub>
+                          <m:r>
+                            <a:rPr lang="it-IT" b="0" i="1" smtClean="0">
+                              <a:latin typeface="Cambria Math" panose="02040503050406030204" pitchFamily="18" charset="0"/>
+                            </a:rPr>
+                            <m:t>2</m:t>
+                          </m:r>
+                        </m:sub>
+                      </m:sSub>
+                      <m:r>
+                        <a:rPr lang="it-IT" b="0" i="1" smtClean="0">
+                          <a:latin typeface="Cambria Math" panose="02040503050406030204" pitchFamily="18" charset="0"/>
+                          <a:ea typeface="Cambria Math" panose="02040503050406030204" pitchFamily="18" charset="0"/>
+                        </a:rPr>
+                        <m:t>~</m:t>
+                      </m:r>
+                      <m:sSub>
+                        <m:sSubPr>
+                          <m:ctrlPr>
+                            <a:rPr lang="it-IT" b="0" i="1" smtClean="0">
+                              <a:latin typeface="Cambria Math" panose="02040503050406030204" pitchFamily="18" charset="0"/>
+                              <a:ea typeface="Cambria Math" panose="02040503050406030204" pitchFamily="18" charset="0"/>
+                            </a:rPr>
+                          </m:ctrlPr>
+                        </m:sSubPr>
+                        <m:e>
+                          <m:r>
+                            <a:rPr lang="it-IT" b="0" i="1" smtClean="0">
+                              <a:latin typeface="Cambria Math" panose="02040503050406030204" pitchFamily="18" charset="0"/>
+                              <a:ea typeface="Cambria Math" panose="02040503050406030204" pitchFamily="18" charset="0"/>
+                            </a:rPr>
+                            <m:t>𝑁</m:t>
+                          </m:r>
+                        </m:e>
+                        <m:sub>
+                          <m:r>
+                            <a:rPr lang="it-IT" b="0" i="1" smtClean="0">
+                              <a:latin typeface="Cambria Math" panose="02040503050406030204" pitchFamily="18" charset="0"/>
+                              <a:ea typeface="Cambria Math" panose="02040503050406030204" pitchFamily="18" charset="0"/>
+                            </a:rPr>
+                            <m:t>2</m:t>
+                          </m:r>
+                        </m:sub>
+                      </m:sSub>
+                      <m:d>
+                        <m:dPr>
+                          <m:ctrlPr>
+                            <a:rPr lang="it-IT" b="0" i="1" smtClean="0">
+                              <a:latin typeface="Cambria Math" panose="02040503050406030204" pitchFamily="18" charset="0"/>
+                              <a:ea typeface="Cambria Math" panose="02040503050406030204" pitchFamily="18" charset="0"/>
+                            </a:rPr>
+                          </m:ctrlPr>
+                        </m:dPr>
+                        <m:e>
+                          <m:r>
+                            <a:rPr lang="it-IT" b="0" i="1" smtClean="0">
+                              <a:latin typeface="Cambria Math" panose="02040503050406030204" pitchFamily="18" charset="0"/>
+                              <a:ea typeface="Cambria Math" panose="02040503050406030204" pitchFamily="18" charset="0"/>
+                            </a:rPr>
+                            <m:t>    </m:t>
+                          </m:r>
+                          <m:r>
+                            <a:rPr lang="it-IT" b="0" i="1" smtClean="0">
+                              <a:latin typeface="Cambria Math" panose="02040503050406030204" pitchFamily="18" charset="0"/>
+                              <a:ea typeface="Cambria Math" panose="02040503050406030204" pitchFamily="18" charset="0"/>
+                            </a:rPr>
+                            <m:t>,</m:t>
+                          </m:r>
+                          <m:r>
+                            <m:rPr>
+                              <m:sty m:val="p"/>
+                            </m:rPr>
+                            <a:rPr lang="it-IT" b="0" i="0" smtClean="0">
+                              <a:latin typeface="Cambria Math" panose="02040503050406030204" pitchFamily="18" charset="0"/>
+                              <a:ea typeface="Cambria Math" panose="02040503050406030204" pitchFamily="18" charset="0"/>
+                            </a:rPr>
+                            <m:t>Σ</m:t>
+                          </m:r>
+                        </m:e>
+                      </m:d>
+                    </m:oMath>
+                  </m:oMathPara>
+                </a14:m>
+                <a:endParaRPr lang="it-IT" dirty="0"/>
+              </a:p>
+            </p:txBody>
+          </p:sp>
+        </mc:Choice>
+        <mc:Fallback>
+          <p:sp>
+            <p:nvSpPr>
+              <p:cNvPr id="12" name="CasellaDiTesto 11">
+                <a:extLst>
+                  <a:ext uri="{FF2B5EF4-FFF2-40B4-BE49-F238E27FC236}">
+                    <a16:creationId xmlns:a16="http://schemas.microsoft.com/office/drawing/2014/main" id="{C17C5DED-FBB2-A515-5FD9-A56E30EEE83B}"/>
+                  </a:ext>
+                </a:extLst>
+              </p:cNvPr>
+              <p:cNvSpPr txBox="1">
+                <a:spLocks noRot="1" noChangeAspect="1" noMove="1" noResize="1" noEditPoints="1" noAdjustHandles="1" noChangeArrowheads="1" noChangeShapeType="1" noTextEdit="1"/>
+              </p:cNvSpPr>
+              <p:nvPr/>
+            </p:nvSpPr>
+            <p:spPr>
+              <a:xfrm>
+                <a:off x="3510438" y="3902546"/>
+                <a:ext cx="1622752" cy="276999"/>
+              </a:xfrm>
+              <a:prstGeom prst="rect">
+                <a:avLst/>
+              </a:prstGeom>
+              <a:blipFill>
+                <a:blip r:embed="rId7"/>
+                <a:stretch>
+                  <a:fillRect l="-1504" b="-13043"/>
+                </a:stretch>
+              </a:blipFill>
+            </p:spPr>
+            <p:txBody>
+              <a:bodyPr/>
+              <a:lstStyle/>
+              <a:p>
+                <a:r>
+                  <a:rPr lang="it-IT">
+                    <a:noFill/>
+                  </a:rPr>
+                  <a:t> </a:t>
+                </a:r>
+              </a:p>
+            </p:txBody>
+          </p:sp>
+        </mc:Fallback>
+      </mc:AlternateContent>
+      <mc:AlternateContent xmlns:mc="http://schemas.openxmlformats.org/markup-compatibility/2006">
+        <mc:Choice xmlns:a14="http://schemas.microsoft.com/office/drawing/2010/main" Requires="a14">
+          <p:sp>
+            <p:nvSpPr>
+              <p:cNvPr id="14" name="CasellaDiTesto 13">
+                <a:extLst>
+                  <a:ext uri="{FF2B5EF4-FFF2-40B4-BE49-F238E27FC236}">
+                    <a16:creationId xmlns:a16="http://schemas.microsoft.com/office/drawing/2014/main" id="{E8F8DFE5-37CA-2192-A683-008F8FE04613}"/>
+                  </a:ext>
+                </a:extLst>
+              </p:cNvPr>
+              <p:cNvSpPr txBox="1"/>
+              <p:nvPr/>
+            </p:nvSpPr>
+            <p:spPr>
+              <a:xfrm>
+                <a:off x="4507334" y="3858871"/>
+                <a:ext cx="365806" cy="369332"/>
+              </a:xfrm>
+              <a:prstGeom prst="rect">
+                <a:avLst/>
+              </a:prstGeom>
+              <a:noFill/>
+            </p:spPr>
+            <p:txBody>
+              <a:bodyPr wrap="none" rtlCol="0">
+                <a:spAutoFit/>
+              </a:bodyPr>
+              <a:lstStyle/>
+              <a:p>
+                <a14:m>
+                  <m:oMathPara xmlns:m="http://schemas.openxmlformats.org/officeDocument/2006/math">
+                    <m:oMathParaPr>
+                      <m:jc m:val="centerGroup"/>
+                    </m:oMathParaPr>
+                    <m:oMath xmlns:m="http://schemas.openxmlformats.org/officeDocument/2006/math">
+                      <m:r>
+                        <a:rPr lang="it-IT" b="0" i="1" u="sng" smtClean="0">
+                          <a:latin typeface="Cambria Math" panose="02040503050406030204" pitchFamily="18" charset="0"/>
+                        </a:rPr>
+                        <m:t>0</m:t>
+                      </m:r>
+                    </m:oMath>
+                  </m:oMathPara>
+                </a14:m>
+                <a:endParaRPr lang="it-IT" u="sng" dirty="0"/>
+              </a:p>
+            </p:txBody>
+          </p:sp>
+        </mc:Choice>
+        <mc:Fallback>
+          <p:sp>
+            <p:nvSpPr>
+              <p:cNvPr id="14" name="CasellaDiTesto 13">
+                <a:extLst>
+                  <a:ext uri="{FF2B5EF4-FFF2-40B4-BE49-F238E27FC236}">
+                    <a16:creationId xmlns:a16="http://schemas.microsoft.com/office/drawing/2014/main" id="{E8F8DFE5-37CA-2192-A683-008F8FE04613}"/>
+                  </a:ext>
+                </a:extLst>
+              </p:cNvPr>
+              <p:cNvSpPr txBox="1">
+                <a:spLocks noRot="1" noChangeAspect="1" noMove="1" noResize="1" noEditPoints="1" noAdjustHandles="1" noChangeArrowheads="1" noChangeShapeType="1" noTextEdit="1"/>
+              </p:cNvSpPr>
+              <p:nvPr/>
+            </p:nvSpPr>
+            <p:spPr>
+              <a:xfrm>
+                <a:off x="4507334" y="3858871"/>
+                <a:ext cx="365806" cy="369332"/>
+              </a:xfrm>
+              <a:prstGeom prst="rect">
+                <a:avLst/>
+              </a:prstGeom>
+              <a:blipFill>
+                <a:blip r:embed="rId8"/>
+                <a:stretch>
+                  <a:fillRect/>
+                </a:stretch>
+              </a:blipFill>
+            </p:spPr>
+            <p:txBody>
+              <a:bodyPr/>
+              <a:lstStyle/>
+              <a:p>
+                <a:r>
+                  <a:rPr lang="it-IT">
+                    <a:noFill/>
+                  </a:rPr>
+                  <a:t> </a:t>
+                </a:r>
+              </a:p>
+            </p:txBody>
+          </p:sp>
+        </mc:Fallback>
+      </mc:AlternateContent>
       <p:sp>
         <p:nvSpPr>
-          <p:cNvPr id="32" name="CasellaDiTesto 31">
+          <p:cNvPr id="15" name="CasellaDiTesto 14">
             <a:extLst>
               <a:ext uri="{FF2B5EF4-FFF2-40B4-BE49-F238E27FC236}">
-                <a16:creationId xmlns:a16="http://schemas.microsoft.com/office/drawing/2014/main" id="{672AAE4F-B3BC-8BD2-516A-6A46A1ACBBDA}"/>
+                <a16:creationId xmlns:a16="http://schemas.microsoft.com/office/drawing/2014/main" id="{AD8693F4-0D21-B18E-B71A-292BA1383E03}"/>
               </a:ext>
             </a:extLst>
           </p:cNvPr>
@@ -1893,8 +3022,8 @@
         </p:nvSpPr>
         <p:spPr>
           <a:xfrm>
-            <a:off x="4845939" y="1283812"/>
-            <a:ext cx="3444595" cy="1754326"/>
+            <a:off x="4025900" y="2595503"/>
+            <a:ext cx="591829" cy="369332"/>
           </a:xfrm>
           <a:prstGeom prst="rect">
             <a:avLst/>
@@ -1902,51 +3031,15 @@
           <a:noFill/>
         </p:spPr>
         <p:txBody>
-          <a:bodyPr rot="0" spcFirstLastPara="0" vertOverflow="overflow" horzOverflow="overflow" vert="horz" wrap="square" lIns="91440" tIns="45720" rIns="91440" bIns="45720" numCol="1" spcCol="0" rtlCol="0" fromWordArt="0" anchor="t" anchorCtr="0" forceAA="0" compatLnSpc="1">
-            <a:prstTxWarp prst="textNoShape">
-              <a:avLst/>
-            </a:prstTxWarp>
+          <a:bodyPr wrap="none" rtlCol="0">
             <a:spAutoFit/>
           </a:bodyPr>
           <a:lstStyle/>
           <a:p>
             <a:r>
-              <a:rPr lang="it-IT">
-                <a:ea typeface="Calibri"/>
-                <a:cs typeface="Calibri"/>
-              </a:rPr>
-              <a:t>Disclaimer </a:t>
+              <a:rPr lang="it-IT" dirty="0"/>
+              <a:t>DGP</a:t>
             </a:r>
-          </a:p>
-          <a:p>
-            <a:endParaRPr lang="it-IT" dirty="0">
-              <a:ea typeface="Calibri"/>
-              <a:cs typeface="Calibri"/>
-            </a:endParaRPr>
-          </a:p>
-          <a:p>
-            <a:r>
-              <a:rPr lang="it-IT" dirty="0">
-                <a:ea typeface="Calibri"/>
-                <a:cs typeface="Calibri"/>
-              </a:rPr>
-              <a:t>è solo una mia proposta di un ragazzo poco creativo se si ha altre </a:t>
-            </a:r>
-            <a:r>
-              <a:rPr lang="it-IT">
-                <a:ea typeface="Calibri"/>
-                <a:cs typeface="Calibri"/>
-              </a:rPr>
-              <a:t>idee o cose più interessanti ben venga </a:t>
-            </a:r>
-            <a:r>
-              <a:rPr lang="it-IT" dirty="0">
-                <a:ea typeface="Calibri"/>
-                <a:cs typeface="Calibri"/>
-              </a:rPr>
-              <a:t> </a:t>
-            </a:r>
-            <a:endParaRPr lang="it-IT" dirty="0"/>
           </a:p>
         </p:txBody>
       </p:sp>
@@ -2043,7 +3136,7 @@
         </p:nvSpPr>
         <p:spPr>
           <a:xfrm>
-            <a:off x="458589" y="1205562"/>
+            <a:off x="446284" y="2516542"/>
             <a:ext cx="4114800" cy="292608"/>
           </a:xfrm>
           <a:prstGeom prst="rect">
@@ -2059,28 +3152,14 @@
             <a:pPr marL="0" indent="0" algn="l">
               <a:buNone/>
             </a:pPr>
-            <a:r>
-              <a:rPr lang="en-US" sz="2000" b="1" dirty="0" err="1">
-                <a:solidFill>
-                  <a:srgbClr val="1B3D7D"/>
-                </a:solidFill>
-                <a:latin typeface="Calibri"/>
-                <a:ea typeface="Calibri"/>
-                <a:cs typeface="Calibri"/>
-              </a:rPr>
-              <a:t>Osservazioni</a:t>
-            </a:r>
-            <a:r>
-              <a:rPr lang="en-US" b="1" dirty="0">
-                <a:solidFill>
-                  <a:srgbClr val="1B3D7D"/>
-                </a:solidFill>
-                <a:latin typeface="Calibri"/>
-                <a:ea typeface="Calibri"/>
-                <a:cs typeface="Calibri"/>
-              </a:rPr>
-              <a:t>:</a:t>
-            </a:r>
+            <a:endParaRPr lang="en-US" b="1" dirty="0">
+              <a:solidFill>
+                <a:srgbClr val="1B3D7D"/>
+              </a:solidFill>
+              <a:latin typeface="Calibri"/>
+              <a:ea typeface="Calibri"/>
+              <a:cs typeface="Calibri"/>
+            </a:endParaRPr>
           </a:p>
         </p:txBody>
       </p:sp>
@@ -2174,8 +3253,8 @@
         </p:nvSpPr>
         <p:spPr>
           <a:xfrm>
-            <a:off x="1820794" y="102089"/>
-            <a:ext cx="6949440" cy="475488"/>
+            <a:off x="3271206" y="100177"/>
+            <a:ext cx="2579756" cy="475488"/>
           </a:xfrm>
           <a:prstGeom prst="rect">
             <a:avLst/>
@@ -2224,12 +3303,535 @@
           </a:p>
         </p:txBody>
       </p:sp>
+      <mc:AlternateContent xmlns:mc="http://schemas.openxmlformats.org/markup-compatibility/2006">
+        <mc:Choice xmlns:a14="http://schemas.microsoft.com/office/drawing/2010/main" Requires="a14">
+          <p:sp>
+            <p:nvSpPr>
+              <p:cNvPr id="8" name="CasellaDiTesto 7">
+                <a:extLst>
+                  <a:ext uri="{FF2B5EF4-FFF2-40B4-BE49-F238E27FC236}">
+                    <a16:creationId xmlns:a16="http://schemas.microsoft.com/office/drawing/2014/main" id="{561C3AB1-D86D-6743-0BDA-E9717783AE00}"/>
+                  </a:ext>
+                </a:extLst>
+              </p:cNvPr>
+              <p:cNvSpPr txBox="1"/>
+              <p:nvPr/>
+            </p:nvSpPr>
+            <p:spPr>
+              <a:xfrm>
+                <a:off x="3007521" y="3634866"/>
+                <a:ext cx="2648353" cy="582852"/>
+              </a:xfrm>
+              <a:prstGeom prst="rect">
+                <a:avLst/>
+              </a:prstGeom>
+              <a:noFill/>
+            </p:spPr>
+            <p:txBody>
+              <a:bodyPr wrap="none" lIns="0" tIns="0" rIns="0" bIns="0" rtlCol="0">
+                <a:spAutoFit/>
+              </a:bodyPr>
+              <a:lstStyle/>
+              <a:p>
+                <a14:m>
+                  <m:oMathPara xmlns:m="http://schemas.openxmlformats.org/officeDocument/2006/math">
+                    <m:oMathParaPr>
+                      <m:jc m:val="centerGroup"/>
+                    </m:oMathParaPr>
+                    <m:oMath xmlns:m="http://schemas.openxmlformats.org/officeDocument/2006/math">
+                      <m:r>
+                        <a:rPr lang="it-IT" b="0" i="1" smtClean="0">
+                          <a:latin typeface="Cambria Math" panose="02040503050406030204" pitchFamily="18" charset="0"/>
+                        </a:rPr>
+                        <m:t>𝐵𝑖𝑎𝑠</m:t>
+                      </m:r>
+                      <m:d>
+                        <m:dPr>
+                          <m:ctrlPr>
+                            <a:rPr lang="it-IT" b="0" i="1" smtClean="0">
+                              <a:latin typeface="Cambria Math" panose="02040503050406030204" pitchFamily="18" charset="0"/>
+                            </a:rPr>
+                          </m:ctrlPr>
+                        </m:dPr>
+                        <m:e>
+                          <m:acc>
+                            <m:accPr>
+                              <m:chr m:val="̂"/>
+                              <m:ctrlPr>
+                                <a:rPr lang="it-IT" b="0" i="1" smtClean="0">
+                                  <a:latin typeface="Cambria Math" panose="02040503050406030204" pitchFamily="18" charset="0"/>
+                                </a:rPr>
+                              </m:ctrlPr>
+                            </m:accPr>
+                            <m:e>
+                              <m:sSub>
+                                <m:sSubPr>
+                                  <m:ctrlPr>
+                                    <a:rPr lang="it-IT" b="0" i="1" smtClean="0">
+                                      <a:latin typeface="Cambria Math" panose="02040503050406030204" pitchFamily="18" charset="0"/>
+                                    </a:rPr>
+                                  </m:ctrlPr>
+                                </m:sSubPr>
+                                <m:e>
+                                  <m:r>
+                                    <a:rPr lang="it-IT" b="0" i="1" smtClean="0">
+                                      <a:latin typeface="Cambria Math" panose="02040503050406030204" pitchFamily="18" charset="0"/>
+                                    </a:rPr>
+                                    <m:t>𝛽</m:t>
+                                  </m:r>
+                                </m:e>
+                                <m:sub>
+                                  <m:r>
+                                    <a:rPr lang="it-IT" b="0" i="1" smtClean="0">
+                                      <a:latin typeface="Cambria Math" panose="02040503050406030204" pitchFamily="18" charset="0"/>
+                                    </a:rPr>
+                                    <m:t>1</m:t>
+                                  </m:r>
+                                </m:sub>
+                              </m:sSub>
+                            </m:e>
+                          </m:acc>
+                        </m:e>
+                      </m:d>
+                      <m:r>
+                        <a:rPr lang="it-IT" b="0" i="1" smtClean="0">
+                          <a:latin typeface="Cambria Math" panose="02040503050406030204" pitchFamily="18" charset="0"/>
+                        </a:rPr>
+                        <m:t>=</m:t>
+                      </m:r>
+                      <m:sSub>
+                        <m:sSubPr>
+                          <m:ctrlPr>
+                            <a:rPr lang="it-IT" b="0" i="1" smtClean="0">
+                              <a:latin typeface="Cambria Math" panose="02040503050406030204" pitchFamily="18" charset="0"/>
+                            </a:rPr>
+                          </m:ctrlPr>
+                        </m:sSubPr>
+                        <m:e>
+                          <m:r>
+                            <a:rPr lang="it-IT" b="0" i="1" smtClean="0">
+                              <a:latin typeface="Cambria Math" panose="02040503050406030204" pitchFamily="18" charset="0"/>
+                            </a:rPr>
+                            <m:t>𝛽</m:t>
+                          </m:r>
+                        </m:e>
+                        <m:sub>
+                          <m:r>
+                            <a:rPr lang="it-IT" b="0" i="1" smtClean="0">
+                              <a:latin typeface="Cambria Math" panose="02040503050406030204" pitchFamily="18" charset="0"/>
+                            </a:rPr>
+                            <m:t>2</m:t>
+                          </m:r>
+                        </m:sub>
+                      </m:sSub>
+                      <m:f>
+                        <m:fPr>
+                          <m:ctrlPr>
+                            <a:rPr lang="it-IT" b="0" i="1" smtClean="0">
+                              <a:latin typeface="Cambria Math" panose="02040503050406030204" pitchFamily="18" charset="0"/>
+                            </a:rPr>
+                          </m:ctrlPr>
+                        </m:fPr>
+                        <m:num>
+                          <m:r>
+                            <a:rPr lang="it-IT" b="0" i="1" smtClean="0">
+                              <a:latin typeface="Cambria Math" panose="02040503050406030204" pitchFamily="18" charset="0"/>
+                            </a:rPr>
+                            <m:t>𝐶𝑜𝑣</m:t>
+                          </m:r>
+                          <m:d>
+                            <m:dPr>
+                              <m:ctrlPr>
+                                <a:rPr lang="it-IT" b="0" i="1" smtClean="0">
+                                  <a:latin typeface="Cambria Math" panose="02040503050406030204" pitchFamily="18" charset="0"/>
+                                </a:rPr>
+                              </m:ctrlPr>
+                            </m:dPr>
+                            <m:e>
+                              <m:sSub>
+                                <m:sSubPr>
+                                  <m:ctrlPr>
+                                    <a:rPr lang="it-IT" b="0" i="1" smtClean="0">
+                                      <a:latin typeface="Cambria Math" panose="02040503050406030204" pitchFamily="18" charset="0"/>
+                                    </a:rPr>
+                                  </m:ctrlPr>
+                                </m:sSubPr>
+                                <m:e>
+                                  <m:r>
+                                    <a:rPr lang="it-IT" b="0" i="1" smtClean="0">
+                                      <a:latin typeface="Cambria Math" panose="02040503050406030204" pitchFamily="18" charset="0"/>
+                                    </a:rPr>
+                                    <m:t>𝑥</m:t>
+                                  </m:r>
+                                </m:e>
+                                <m:sub>
+                                  <m:r>
+                                    <a:rPr lang="it-IT" b="0" i="1" smtClean="0">
+                                      <a:latin typeface="Cambria Math" panose="02040503050406030204" pitchFamily="18" charset="0"/>
+                                    </a:rPr>
+                                    <m:t>1</m:t>
+                                  </m:r>
+                                </m:sub>
+                              </m:sSub>
+                              <m:r>
+                                <a:rPr lang="it-IT" b="0" i="1" smtClean="0">
+                                  <a:latin typeface="Cambria Math" panose="02040503050406030204" pitchFamily="18" charset="0"/>
+                                </a:rPr>
+                                <m:t>,</m:t>
+                              </m:r>
+                              <m:sSub>
+                                <m:sSubPr>
+                                  <m:ctrlPr>
+                                    <a:rPr lang="it-IT" b="0" i="1" smtClean="0">
+                                      <a:latin typeface="Cambria Math" panose="02040503050406030204" pitchFamily="18" charset="0"/>
+                                    </a:rPr>
+                                  </m:ctrlPr>
+                                </m:sSubPr>
+                                <m:e>
+                                  <m:r>
+                                    <a:rPr lang="it-IT" b="0" i="1" smtClean="0">
+                                      <a:latin typeface="Cambria Math" panose="02040503050406030204" pitchFamily="18" charset="0"/>
+                                    </a:rPr>
+                                    <m:t>𝑥</m:t>
+                                  </m:r>
+                                </m:e>
+                                <m:sub>
+                                  <m:r>
+                                    <a:rPr lang="it-IT" b="0" i="1" smtClean="0">
+                                      <a:latin typeface="Cambria Math" panose="02040503050406030204" pitchFamily="18" charset="0"/>
+                                    </a:rPr>
+                                    <m:t>2</m:t>
+                                  </m:r>
+                                </m:sub>
+                              </m:sSub>
+                            </m:e>
+                          </m:d>
+                        </m:num>
+                        <m:den>
+                          <m:r>
+                            <a:rPr lang="it-IT" b="0" i="1" smtClean="0">
+                              <a:latin typeface="Cambria Math" panose="02040503050406030204" pitchFamily="18" charset="0"/>
+                            </a:rPr>
+                            <m:t>𝑉𝑎𝑟</m:t>
+                          </m:r>
+                          <m:d>
+                            <m:dPr>
+                              <m:ctrlPr>
+                                <a:rPr lang="it-IT" b="0" i="1" smtClean="0">
+                                  <a:latin typeface="Cambria Math" panose="02040503050406030204" pitchFamily="18" charset="0"/>
+                                </a:rPr>
+                              </m:ctrlPr>
+                            </m:dPr>
+                            <m:e>
+                              <m:sSub>
+                                <m:sSubPr>
+                                  <m:ctrlPr>
+                                    <a:rPr lang="it-IT" b="0" i="1" smtClean="0">
+                                      <a:latin typeface="Cambria Math" panose="02040503050406030204" pitchFamily="18" charset="0"/>
+                                    </a:rPr>
+                                  </m:ctrlPr>
+                                </m:sSubPr>
+                                <m:e>
+                                  <m:r>
+                                    <a:rPr lang="it-IT" b="0" i="1" smtClean="0">
+                                      <a:latin typeface="Cambria Math" panose="02040503050406030204" pitchFamily="18" charset="0"/>
+                                    </a:rPr>
+                                    <m:t>𝑥</m:t>
+                                  </m:r>
+                                </m:e>
+                                <m:sub>
+                                  <m:r>
+                                    <a:rPr lang="it-IT" b="0" i="1" smtClean="0">
+                                      <a:latin typeface="Cambria Math" panose="02040503050406030204" pitchFamily="18" charset="0"/>
+                                    </a:rPr>
+                                    <m:t>1</m:t>
+                                  </m:r>
+                                </m:sub>
+                              </m:sSub>
+                            </m:e>
+                          </m:d>
+                        </m:den>
+                      </m:f>
+                    </m:oMath>
+                  </m:oMathPara>
+                </a14:m>
+                <a:endParaRPr lang="it-IT" dirty="0"/>
+              </a:p>
+            </p:txBody>
+          </p:sp>
+        </mc:Choice>
+        <mc:Fallback>
+          <p:sp>
+            <p:nvSpPr>
+              <p:cNvPr id="8" name="CasellaDiTesto 7">
+                <a:extLst>
+                  <a:ext uri="{FF2B5EF4-FFF2-40B4-BE49-F238E27FC236}">
+                    <a16:creationId xmlns:a16="http://schemas.microsoft.com/office/drawing/2014/main" id="{561C3AB1-D86D-6743-0BDA-E9717783AE00}"/>
+                  </a:ext>
+                </a:extLst>
+              </p:cNvPr>
+              <p:cNvSpPr txBox="1">
+                <a:spLocks noRot="1" noChangeAspect="1" noMove="1" noResize="1" noEditPoints="1" noAdjustHandles="1" noChangeArrowheads="1" noChangeShapeType="1" noTextEdit="1"/>
+              </p:cNvSpPr>
+              <p:nvPr/>
+            </p:nvSpPr>
+            <p:spPr>
+              <a:xfrm>
+                <a:off x="3007521" y="3634866"/>
+                <a:ext cx="2648353" cy="582852"/>
+              </a:xfrm>
+              <a:prstGeom prst="rect">
+                <a:avLst/>
+              </a:prstGeom>
+              <a:blipFill>
+                <a:blip r:embed="rId4"/>
+                <a:stretch>
+                  <a:fillRect/>
+                </a:stretch>
+              </a:blipFill>
+            </p:spPr>
+            <p:txBody>
+              <a:bodyPr/>
+              <a:lstStyle/>
+              <a:p>
+                <a:r>
+                  <a:rPr lang="it-IT">
+                    <a:noFill/>
+                  </a:rPr>
+                  <a:t> </a:t>
+                </a:r>
+              </a:p>
+            </p:txBody>
+          </p:sp>
+        </mc:Fallback>
+      </mc:AlternateContent>
+      <mc:AlternateContent xmlns:mc="http://schemas.openxmlformats.org/markup-compatibility/2006">
+        <mc:Choice xmlns:a14="http://schemas.microsoft.com/office/drawing/2010/main" Requires="a14">
+          <p:sp>
+            <p:nvSpPr>
+              <p:cNvPr id="9" name="CasellaDiTesto 8">
+                <a:extLst>
+                  <a:ext uri="{FF2B5EF4-FFF2-40B4-BE49-F238E27FC236}">
+                    <a16:creationId xmlns:a16="http://schemas.microsoft.com/office/drawing/2014/main" id="{67E6F6D8-F5F0-D9F5-B286-2855F4F5B73B}"/>
+                  </a:ext>
+                </a:extLst>
+              </p:cNvPr>
+              <p:cNvSpPr txBox="1"/>
+              <p:nvPr/>
+            </p:nvSpPr>
+            <p:spPr>
+              <a:xfrm>
+                <a:off x="618019" y="671368"/>
+                <a:ext cx="3280000" cy="646331"/>
+              </a:xfrm>
+              <a:prstGeom prst="rect">
+                <a:avLst/>
+              </a:prstGeom>
+              <a:noFill/>
+            </p:spPr>
+            <p:txBody>
+              <a:bodyPr wrap="none" rtlCol="0">
+                <a:spAutoFit/>
+              </a:bodyPr>
+              <a:lstStyle/>
+              <a:p>
+                <a:r>
+                  <a:rPr lang="it-IT" dirty="0"/>
+                  <a:t>Scenario 1:</a:t>
+                </a:r>
+              </a:p>
+              <a:p>
+                <a:pPr/>
+                <a14:m>
+                  <m:oMathPara xmlns:m="http://schemas.openxmlformats.org/officeDocument/2006/math">
+                    <m:oMathParaPr>
+                      <m:jc m:val="centerGroup"/>
+                    </m:oMathParaPr>
+                    <m:oMath xmlns:m="http://schemas.openxmlformats.org/officeDocument/2006/math">
+                      <m:sSub>
+                        <m:sSubPr>
+                          <m:ctrlPr>
+                            <a:rPr lang="it-IT" i="1">
+                              <a:latin typeface="Cambria Math" panose="02040503050406030204" pitchFamily="18" charset="0"/>
+                            </a:rPr>
+                          </m:ctrlPr>
+                        </m:sSubPr>
+                        <m:e>
+                          <m:r>
+                            <a:rPr lang="it-IT" i="1">
+                              <a:latin typeface="Cambria Math" panose="02040503050406030204" pitchFamily="18" charset="0"/>
+                            </a:rPr>
+                            <m:t>𝑥</m:t>
+                          </m:r>
+                        </m:e>
+                        <m:sub>
+                          <m:r>
+                            <a:rPr lang="it-IT" i="1">
+                              <a:latin typeface="Cambria Math" panose="02040503050406030204" pitchFamily="18" charset="0"/>
+                            </a:rPr>
+                            <m:t>1</m:t>
+                          </m:r>
+                        </m:sub>
+                      </m:sSub>
+                      <m:r>
+                        <a:rPr lang="it-IT" i="1">
+                          <a:latin typeface="Cambria Math" panose="02040503050406030204" pitchFamily="18" charset="0"/>
+                        </a:rPr>
+                        <m:t> </m:t>
+                      </m:r>
+                      <m:r>
+                        <a:rPr lang="it-IT" i="1">
+                          <a:latin typeface="Cambria Math" panose="02040503050406030204" pitchFamily="18" charset="0"/>
+                        </a:rPr>
+                        <m:t>𝑒</m:t>
+                      </m:r>
+                      <m:r>
+                        <a:rPr lang="it-IT" i="1">
+                          <a:latin typeface="Cambria Math" panose="02040503050406030204" pitchFamily="18" charset="0"/>
+                        </a:rPr>
+                        <m:t> </m:t>
+                      </m:r>
+                      <m:sSub>
+                        <m:sSubPr>
+                          <m:ctrlPr>
+                            <a:rPr lang="it-IT" i="1">
+                              <a:latin typeface="Cambria Math" panose="02040503050406030204" pitchFamily="18" charset="0"/>
+                            </a:rPr>
+                          </m:ctrlPr>
+                        </m:sSubPr>
+                        <m:e>
+                          <m:r>
+                            <a:rPr lang="it-IT" i="1">
+                              <a:latin typeface="Cambria Math" panose="02040503050406030204" pitchFamily="18" charset="0"/>
+                            </a:rPr>
+                            <m:t>𝑥</m:t>
+                          </m:r>
+                        </m:e>
+                        <m:sub>
+                          <m:r>
+                            <a:rPr lang="it-IT" i="1">
+                              <a:latin typeface="Cambria Math" panose="02040503050406030204" pitchFamily="18" charset="0"/>
+                            </a:rPr>
+                            <m:t>2</m:t>
+                          </m:r>
+                        </m:sub>
+                      </m:sSub>
+                      <m:r>
+                        <a:rPr lang="it-IT" i="1">
+                          <a:latin typeface="Cambria Math" panose="02040503050406030204" pitchFamily="18" charset="0"/>
+                        </a:rPr>
+                        <m:t> </m:t>
+                      </m:r>
+                      <m:r>
+                        <a:rPr lang="it-IT" i="1">
+                          <a:latin typeface="Cambria Math" panose="02040503050406030204" pitchFamily="18" charset="0"/>
+                        </a:rPr>
+                        <m:t>𝑠</m:t>
+                      </m:r>
+                      <m:r>
+                        <m:rPr>
+                          <m:sty m:val="p"/>
+                        </m:rPr>
+                        <a:rPr lang="it-IT" i="1">
+                          <a:latin typeface="Cambria Math" panose="02040503050406030204" pitchFamily="18" charset="0"/>
+                        </a:rPr>
+                        <m:t>ono</m:t>
+                      </m:r>
+                      <m:r>
+                        <a:rPr lang="it-IT" i="1">
+                          <a:latin typeface="Cambria Math" panose="02040503050406030204" pitchFamily="18" charset="0"/>
+                        </a:rPr>
+                        <m:t> </m:t>
+                      </m:r>
+                      <m:r>
+                        <m:rPr>
+                          <m:sty m:val="p"/>
+                        </m:rPr>
+                        <a:rPr lang="it-IT" i="1">
+                          <a:latin typeface="Cambria Math" panose="02040503050406030204" pitchFamily="18" charset="0"/>
+                        </a:rPr>
+                        <m:t>correlate</m:t>
+                      </m:r>
+                      <m:r>
+                        <a:rPr lang="it-IT" i="1">
+                          <a:latin typeface="Cambria Math" panose="02040503050406030204" pitchFamily="18" charset="0"/>
+                        </a:rPr>
+                        <m:t>, </m:t>
+                      </m:r>
+                      <m:r>
+                        <m:rPr>
+                          <m:sty m:val="p"/>
+                        </m:rPr>
+                        <a:rPr lang="it-IT" i="1">
+                          <a:latin typeface="Cambria Math" panose="02040503050406030204" pitchFamily="18" charset="0"/>
+                        </a:rPr>
+                        <m:t>ρ</m:t>
+                      </m:r>
+                      <m:r>
+                        <a:rPr lang="it-IT" i="1">
+                          <a:latin typeface="Cambria Math" panose="02040503050406030204" pitchFamily="18" charset="0"/>
+                        </a:rPr>
+                        <m:t>=0.5</m:t>
+                      </m:r>
+                    </m:oMath>
+                  </m:oMathPara>
+                </a14:m>
+                <a:endParaRPr lang="it-IT" dirty="0"/>
+              </a:p>
+            </p:txBody>
+          </p:sp>
+        </mc:Choice>
+        <mc:Fallback>
+          <p:sp>
+            <p:nvSpPr>
+              <p:cNvPr id="9" name="CasellaDiTesto 8">
+                <a:extLst>
+                  <a:ext uri="{FF2B5EF4-FFF2-40B4-BE49-F238E27FC236}">
+                    <a16:creationId xmlns:a16="http://schemas.microsoft.com/office/drawing/2014/main" id="{67E6F6D8-F5F0-D9F5-B286-2855F4F5B73B}"/>
+                  </a:ext>
+                </a:extLst>
+              </p:cNvPr>
+              <p:cNvSpPr txBox="1">
+                <a:spLocks noRot="1" noChangeAspect="1" noMove="1" noResize="1" noEditPoints="1" noAdjustHandles="1" noChangeArrowheads="1" noChangeShapeType="1" noTextEdit="1"/>
+              </p:cNvSpPr>
+              <p:nvPr/>
+            </p:nvSpPr>
+            <p:spPr>
+              <a:xfrm>
+                <a:off x="618019" y="671368"/>
+                <a:ext cx="3280000" cy="646331"/>
+              </a:xfrm>
+              <a:prstGeom prst="rect">
+                <a:avLst/>
+              </a:prstGeom>
+              <a:blipFill>
+                <a:blip r:embed="rId5"/>
+                <a:stretch>
+                  <a:fillRect l="-1487" t="-4717" b="-3774"/>
+                </a:stretch>
+              </a:blipFill>
+            </p:spPr>
+            <p:txBody>
+              <a:bodyPr/>
+              <a:lstStyle/>
+              <a:p>
+                <a:r>
+                  <a:rPr lang="it-IT">
+                    <a:noFill/>
+                  </a:rPr>
+                  <a:t> </a:t>
+                </a:r>
+              </a:p>
+            </p:txBody>
+          </p:sp>
+        </mc:Fallback>
+      </mc:AlternateContent>
       <p:pic>
         <p:nvPicPr>
-          <p:cNvPr id="2" name="Immagine 1" descr="Immagine che contiene diagramma, Diagramma, linea&#10;&#10;Il contenuto generato dall&amp;#39;IA potrebbe non essere corretto.">
+          <p:cNvPr id="11" name="Immagine 10">
             <a:extLst>
               <a:ext uri="{FF2B5EF4-FFF2-40B4-BE49-F238E27FC236}">
-                <a16:creationId xmlns:a16="http://schemas.microsoft.com/office/drawing/2014/main" id="{28BD64FB-27C8-DA3A-C4E9-EDEFDC2919AA}"/>
+                <a16:creationId xmlns:a16="http://schemas.microsoft.com/office/drawing/2014/main" id="{0DE774CF-6105-E363-5A69-27BF818E5DAD}"/>
               </a:ext>
             </a:extLst>
           </p:cNvPr>
@@ -2239,22 +3841,266 @@
           <p:nvPr/>
         </p:nvPicPr>
         <p:blipFill>
-          <a:blip r:embed="rId4"/>
+          <a:blip r:embed="rId6"/>
           <a:stretch>
             <a:fillRect/>
           </a:stretch>
         </p:blipFill>
         <p:spPr>
           <a:xfrm>
-            <a:off x="4275847" y="839165"/>
-            <a:ext cx="4723015" cy="4203058"/>
+            <a:off x="12451" y="1326596"/>
+            <a:ext cx="4503600" cy="1897780"/>
           </a:xfrm>
           <a:prstGeom prst="rect">
             <a:avLst/>
           </a:prstGeom>
-          <a:ln>
-            <a:noFill/>
-          </a:ln>
+        </p:spPr>
+      </p:pic>
+      <mc:AlternateContent xmlns:mc="http://schemas.openxmlformats.org/markup-compatibility/2006">
+        <mc:Choice xmlns:a14="http://schemas.microsoft.com/office/drawing/2010/main" Requires="a14">
+          <p:sp>
+            <p:nvSpPr>
+              <p:cNvPr id="12" name="CasellaDiTesto 11">
+                <a:extLst>
+                  <a:ext uri="{FF2B5EF4-FFF2-40B4-BE49-F238E27FC236}">
+                    <a16:creationId xmlns:a16="http://schemas.microsoft.com/office/drawing/2014/main" id="{A98ECFBA-3545-F6FE-9A43-27F085A94A70}"/>
+                  </a:ext>
+                </a:extLst>
+              </p:cNvPr>
+              <p:cNvSpPr txBox="1"/>
+              <p:nvPr/>
+            </p:nvSpPr>
+            <p:spPr>
+              <a:xfrm>
+                <a:off x="5033648" y="671367"/>
+                <a:ext cx="3368166" cy="646331"/>
+              </a:xfrm>
+              <a:prstGeom prst="rect">
+                <a:avLst/>
+              </a:prstGeom>
+              <a:noFill/>
+            </p:spPr>
+            <p:txBody>
+              <a:bodyPr wrap="none" rtlCol="0">
+                <a:spAutoFit/>
+              </a:bodyPr>
+              <a:lstStyle/>
+              <a:p>
+                <a:r>
+                  <a:rPr lang="it-IT" dirty="0"/>
+                  <a:t>Scenario 2:</a:t>
+                </a:r>
+              </a:p>
+              <a:p>
+                <a14:m>
+                  <m:oMath xmlns:m="http://schemas.openxmlformats.org/officeDocument/2006/math">
+                    <m:sSub>
+                      <m:sSubPr>
+                        <m:ctrlPr>
+                          <a:rPr lang="it-IT" i="1">
+                            <a:latin typeface="Cambria Math" panose="02040503050406030204" pitchFamily="18" charset="0"/>
+                          </a:rPr>
+                        </m:ctrlPr>
+                      </m:sSubPr>
+                      <m:e>
+                        <m:r>
+                          <a:rPr lang="it-IT" i="1">
+                            <a:latin typeface="Cambria Math" panose="02040503050406030204" pitchFamily="18" charset="0"/>
+                          </a:rPr>
+                          <m:t>𝑥</m:t>
+                        </m:r>
+                      </m:e>
+                      <m:sub>
+                        <m:r>
+                          <a:rPr lang="it-IT" i="1">
+                            <a:latin typeface="Cambria Math" panose="02040503050406030204" pitchFamily="18" charset="0"/>
+                          </a:rPr>
+                          <m:t>1</m:t>
+                        </m:r>
+                      </m:sub>
+                    </m:sSub>
+                    <m:r>
+                      <a:rPr lang="it-IT" i="1">
+                        <a:latin typeface="Cambria Math" panose="02040503050406030204" pitchFamily="18" charset="0"/>
+                      </a:rPr>
+                      <m:t> </m:t>
+                    </m:r>
+                    <m:r>
+                      <a:rPr lang="it-IT" i="1">
+                        <a:latin typeface="Cambria Math" panose="02040503050406030204" pitchFamily="18" charset="0"/>
+                      </a:rPr>
+                      <m:t>𝑒</m:t>
+                    </m:r>
+                    <m:r>
+                      <a:rPr lang="it-IT" i="1">
+                        <a:latin typeface="Cambria Math" panose="02040503050406030204" pitchFamily="18" charset="0"/>
+                      </a:rPr>
+                      <m:t> </m:t>
+                    </m:r>
+                    <m:sSub>
+                      <m:sSubPr>
+                        <m:ctrlPr>
+                          <a:rPr lang="it-IT" i="1">
+                            <a:latin typeface="Cambria Math" panose="02040503050406030204" pitchFamily="18" charset="0"/>
+                          </a:rPr>
+                        </m:ctrlPr>
+                      </m:sSubPr>
+                      <m:e>
+                        <m:r>
+                          <a:rPr lang="it-IT" i="1">
+                            <a:latin typeface="Cambria Math" panose="02040503050406030204" pitchFamily="18" charset="0"/>
+                          </a:rPr>
+                          <m:t>𝑥</m:t>
+                        </m:r>
+                      </m:e>
+                      <m:sub>
+                        <m:r>
+                          <a:rPr lang="it-IT" i="1">
+                            <a:latin typeface="Cambria Math" panose="02040503050406030204" pitchFamily="18" charset="0"/>
+                          </a:rPr>
+                          <m:t>2</m:t>
+                        </m:r>
+                      </m:sub>
+                    </m:sSub>
+                    <m:r>
+                      <a:rPr lang="it-IT" i="1">
+                        <a:latin typeface="Cambria Math" panose="02040503050406030204" pitchFamily="18" charset="0"/>
+                      </a:rPr>
+                      <m:t> </m:t>
+                    </m:r>
+                    <m:r>
+                      <a:rPr lang="it-IT" i="1">
+                        <a:latin typeface="Cambria Math" panose="02040503050406030204" pitchFamily="18" charset="0"/>
+                      </a:rPr>
+                      <m:t>𝑠</m:t>
+                    </m:r>
+                    <m:r>
+                      <m:rPr>
+                        <m:sty m:val="p"/>
+                      </m:rPr>
+                      <a:rPr lang="it-IT" i="1">
+                        <a:latin typeface="Cambria Math" panose="02040503050406030204" pitchFamily="18" charset="0"/>
+                      </a:rPr>
+                      <m:t>ono</m:t>
+                    </m:r>
+                    <m:r>
+                      <a:rPr lang="it-IT" i="1">
+                        <a:latin typeface="Cambria Math" panose="02040503050406030204" pitchFamily="18" charset="0"/>
+                      </a:rPr>
+                      <m:t> </m:t>
+                    </m:r>
+                    <m:r>
+                      <m:rPr>
+                        <m:sty m:val="p"/>
+                      </m:rPr>
+                      <a:rPr lang="it-IT" i="1">
+                        <a:latin typeface="Cambria Math" panose="02040503050406030204" pitchFamily="18" charset="0"/>
+                      </a:rPr>
+                      <m:t>indipendenti</m:t>
+                    </m:r>
+                  </m:oMath>
+                </a14:m>
+                <a:r>
+                  <a:rPr lang="it-IT" dirty="0"/>
+                  <a:t>, </a:t>
+                </a:r>
+                <a14:m>
+                  <m:oMath xmlns:m="http://schemas.openxmlformats.org/officeDocument/2006/math">
+                    <m:r>
+                      <m:rPr>
+                        <m:sty m:val="p"/>
+                      </m:rPr>
+                      <a:rPr lang="it-IT" i="1">
+                        <a:latin typeface="Cambria Math" panose="02040503050406030204" pitchFamily="18" charset="0"/>
+                      </a:rPr>
+                      <m:t>ρ</m:t>
+                    </m:r>
+                    <m:r>
+                      <a:rPr lang="it-IT" i="1">
+                        <a:latin typeface="Cambria Math" panose="02040503050406030204" pitchFamily="18" charset="0"/>
+                      </a:rPr>
+                      <m:t>=0</m:t>
+                    </m:r>
+                  </m:oMath>
+                </a14:m>
+                <a:endParaRPr lang="it-IT" dirty="0"/>
+              </a:p>
+            </p:txBody>
+          </p:sp>
+        </mc:Choice>
+        <mc:Fallback>
+          <p:sp>
+            <p:nvSpPr>
+              <p:cNvPr id="12" name="CasellaDiTesto 11">
+                <a:extLst>
+                  <a:ext uri="{FF2B5EF4-FFF2-40B4-BE49-F238E27FC236}">
+                    <a16:creationId xmlns:a16="http://schemas.microsoft.com/office/drawing/2014/main" id="{A98ECFBA-3545-F6FE-9A43-27F085A94A70}"/>
+                  </a:ext>
+                </a:extLst>
+              </p:cNvPr>
+              <p:cNvSpPr txBox="1">
+                <a:spLocks noRot="1" noChangeAspect="1" noMove="1" noResize="1" noEditPoints="1" noAdjustHandles="1" noChangeArrowheads="1" noChangeShapeType="1" noTextEdit="1"/>
+              </p:cNvSpPr>
+              <p:nvPr/>
+            </p:nvSpPr>
+            <p:spPr>
+              <a:xfrm>
+                <a:off x="5033648" y="671367"/>
+                <a:ext cx="3368166" cy="646331"/>
+              </a:xfrm>
+              <a:prstGeom prst="rect">
+                <a:avLst/>
+              </a:prstGeom>
+              <a:blipFill>
+                <a:blip r:embed="rId7"/>
+                <a:stretch>
+                  <a:fillRect l="-1630" t="-4717" b="-14151"/>
+                </a:stretch>
+              </a:blipFill>
+            </p:spPr>
+            <p:txBody>
+              <a:bodyPr/>
+              <a:lstStyle/>
+              <a:p>
+                <a:r>
+                  <a:rPr lang="it-IT">
+                    <a:noFill/>
+                  </a:rPr>
+                  <a:t> </a:t>
+                </a:r>
+              </a:p>
+            </p:txBody>
+          </p:sp>
+        </mc:Fallback>
+      </mc:AlternateContent>
+      <p:pic>
+        <p:nvPicPr>
+          <p:cNvPr id="14" name="Immagine 13">
+            <a:extLst>
+              <a:ext uri="{FF2B5EF4-FFF2-40B4-BE49-F238E27FC236}">
+                <a16:creationId xmlns:a16="http://schemas.microsoft.com/office/drawing/2014/main" id="{C11C00D2-CEC7-F241-B854-B77954A151A0}"/>
+              </a:ext>
+            </a:extLst>
+          </p:cNvPr>
+          <p:cNvPicPr>
+            <a:picLocks noChangeAspect="1"/>
+          </p:cNvPicPr>
+          <p:nvPr/>
+        </p:nvPicPr>
+        <p:blipFill>
+          <a:blip r:embed="rId8"/>
+          <a:stretch>
+            <a:fillRect/>
+          </a:stretch>
+        </p:blipFill>
+        <p:spPr>
+          <a:xfrm>
+            <a:off x="4465834" y="1278259"/>
+            <a:ext cx="4503795" cy="1994453"/>
+          </a:xfrm>
+          <a:prstGeom prst="rect">
+            <a:avLst/>
+          </a:prstGeom>
         </p:spPr>
       </p:pic>
     </p:spTree>
